--- a/Topic_A/Exam_Practice/AT-A-L09_Speaking_Workshop_Travel_and_Transport_for_Everyday_Journeys.pptx
+++ b/Topic_A/Exam_Practice/AT-A-L09_Speaking_Workshop_Travel_and_Transport_for_Everyday_Journeys.pptx
@@ -523,7 +523,11 @@
           <a:lstStyle/>
           <a:p>
             <a:r>
-              <a:rPr lang="en-US" dirty="0"/>
+              <a:rPr lang="ar-SA" dirty="0">
+                <a:latin typeface="Amiri" pitchFamily="2" charset="-78"/>
+                <a:ea typeface="Amiri" pitchFamily="2" charset="-78"/>
+                <a:cs typeface="Amiri" pitchFamily="2" charset="-78"/>
+              </a:rPr>
               <a:t>WORKSHOP AT A GLANCE — 60 minutes on Teams, mostly in breakout rooms of three.
 0–2 Welcome · 2–6 How Paper 3 works · 6–10 Language bank · 10–13 Breakout routine · 13–33 Role plays A–D in rooms (rotate roles) · 33–37 Role-play models (main room) · 37–50 Topic conversation in rooms · 50–55 Conversation models · 55–58 Feedback + self-check · 58–60 Close.
 Content: teacher-made exam scenarios for Advanced Topic A, Lesson 9 (Travel and Transport for Everyday Journeys, AT-A-L09), using that lesson’s language (travel verbs with bi- (by); prepositions; time; comparatives (أَسْرَعُ مِنْ); directions). Every task has Core · Develop · Stretch support and a model answer.
@@ -615,7 +619,11 @@
           <a:lstStyle/>
           <a:p>
             <a:r>
-              <a:rPr lang="en-US" dirty="0"/>
+              <a:rPr lang="ar-SA" dirty="0">
+                <a:latin typeface="Amiri" pitchFamily="2" charset="-78"/>
+                <a:ea typeface="Amiri" pitchFamily="2" charset="-78"/>
+                <a:cs typeface="Amiri" pitchFamily="2" charset="-78"/>
+              </a:rPr>
               <a:t>ROLE PLAY C (Develop) — lost in town.
 SET-UP IN THE BREAKOUT ROOM: A = examiner (reads the left column ONLY — the questions, in order), B = candidate (sees the task column; Core may use the help column), C = observer (ticks the feedback checklist). 1 minute preparation, about 3 minutes speaking, 1 minute feedback, then rotate.
 Task ! is the unexpected question: in the exam the candidate has not seen it — the examiner should read it without warning.
@@ -707,7 +715,11 @@
           <a:lstStyle/>
           <a:p>
             <a:r>
-              <a:rPr lang="en-US" dirty="0"/>
+              <a:rPr lang="ar-SA" dirty="0">
+                <a:latin typeface="Amiri" pitchFamily="2" charset="-78"/>
+                <a:ea typeface="Amiri" pitchFamily="2" charset="-78"/>
+                <a:cs typeface="Amiri" pitchFamily="2" charset="-78"/>
+              </a:rPr>
               <a:t>ROLE PLAY D (Stretch) — a council survey.
 SET-UP IN THE BREAKOUT ROOM: A = examiner (reads the left column ONLY — the questions, in order), B = candidate (sees the task column; Core may use the help column), C = observer (ticks the feedback checklist). 1 minute preparation, about 3 minutes speaking, 1 minute feedback, then rotate.
 Task ! is the unexpected question: in the exam the candidate has not seen it — the examiner should read it without warning.
@@ -1243,7 +1255,11 @@
           <a:lstStyle/>
           <a:p>
             <a:r>
-              <a:rPr lang="en-US" dirty="0"/>
+              <a:rPr lang="ar-SA" dirty="0">
+                <a:latin typeface="Amiri" pitchFamily="2" charset="-78"/>
+                <a:ea typeface="Amiri" pitchFamily="2" charset="-78"/>
+                <a:cs typeface="Amiri" pitchFamily="2" charset="-78"/>
+              </a:rPr>
               <a:t>TOPIC CONVERSATION — Core. Examiner asks the questions in order and may add “لِمَاذَا؟ / هَلْ يُمْكِنُ أَنْ تَشْرَحَ أَكْثَرَ؟” to push for more. Candidate aims for one full sentence per question.
 </a:t>
             </a:r>
@@ -1332,7 +1348,11 @@
           <a:lstStyle/>
           <a:p>
             <a:r>
-              <a:rPr lang="en-US" dirty="0"/>
+              <a:rPr lang="ar-SA" dirty="0">
+                <a:latin typeface="Amiri" pitchFamily="2" charset="-78"/>
+                <a:ea typeface="Amiri" pitchFamily="2" charset="-78"/>
+                <a:cs typeface="Amiri" pitchFamily="2" charset="-78"/>
+              </a:rPr>
               <a:t>TOPIC CONVERSATION — Develop. Examiner asks the questions in order and may add “لِمَاذَا؟ / هَلْ يُمْكِنُ أَنْ تَشْرَحَ أَكْثَرَ؟” to push for more. Candidate aims for two or three sentences, with a comparison and a past journey.
 </a:t>
             </a:r>
@@ -1421,7 +1441,11 @@
           <a:lstStyle/>
           <a:p>
             <a:r>
-              <a:rPr lang="en-US" dirty="0"/>
+              <a:rPr lang="ar-SA" dirty="0">
+                <a:latin typeface="Amiri" pitchFamily="2" charset="-78"/>
+                <a:ea typeface="Amiri" pitchFamily="2" charset="-78"/>
+                <a:cs typeface="Amiri" pitchFamily="2" charset="-78"/>
+              </a:rPr>
               <a:t>TOPIC CONVERSATION — Stretch. Examiner asks the questions in order and may add “لِمَاذَا؟ / هَلْ يُمْكِنُ أَنْ تَشْرَحَ أَكْثَرَ؟” to push for more. Candidate aims for a developed answer: opinion, comparison, concession and a conditional.
 </a:t>
             </a:r>
@@ -1510,7 +1534,11 @@
           <a:lstStyle/>
           <a:p>
             <a:r>
-              <a:rPr lang="en-US" dirty="0"/>
+              <a:rPr lang="ar-SA" dirty="0">
+                <a:latin typeface="Amiri" pitchFamily="2" charset="-78"/>
+                <a:ea typeface="Amiri" pitchFamily="2" charset="-78"/>
+                <a:cs typeface="Amiri" pitchFamily="2" charset="-78"/>
+              </a:rPr>
               <a:t>WELCOME (1 min) — while students join.
 • Greet each student by name as they arrive: السَّلَامُ عَلَيْكُمْ. Take the register (Pastoral Tracker: attendance 0/1).
 • 2-MINUTE CHECK-IN (SEND training): a private chat to any student who seemed unsettled last lesson — “Are you okay today? 👍 / 👎”.
@@ -2224,7 +2252,11 @@
           <a:lstStyle/>
           <a:p>
             <a:r>
-              <a:rPr lang="en-US" dirty="0"/>
+              <a:rPr lang="ar-SA" dirty="0">
+                <a:latin typeface="Amiri" pitchFamily="2" charset="-78"/>
+                <a:ea typeface="Amiri" pitchFamily="2" charset="-78"/>
+                <a:cs typeface="Amiri" pitchFamily="2" charset="-78"/>
+              </a:rPr>
               <a:t>TEACH (3 min). Role play = precise and complete; conversation = develop. Choral repetition of the repair phrases. To a girl: تُعِيدِي.</a:t>
             </a:r>
             <a:endParaRPr lang="en-US" dirty="0"/>
@@ -2312,7 +2344,11 @@
           <a:lstStyle/>
           <a:p>
             <a:r>
-              <a:rPr lang="en-US" dirty="0"/>
+              <a:rPr lang="ar-SA" dirty="0">
+                <a:latin typeface="Amiri" pitchFamily="2" charset="-78"/>
+                <a:ea typeface="Amiri" pitchFamily="2" charset="-78"/>
+                <a:cs typeface="Amiri" pitchFamily="2" charset="-78"/>
+              </a:rPr>
               <a:t>LANGUAGE BANK (2 min) — means of transport with bi-: بِالحَافِلَةِ · بِالقِطَارِ · بِالسَّيَّارَةِ — but on foot = مَشْيًا عَلَى الأَقْدَامِ. Time taken: تَسْتَغْرِقُ الرِّحْلَةُ عِشْرِينَ دَقِيقَةً.</a:t>
             </a:r>
             <a:endParaRPr lang="en-US" dirty="0"/>
@@ -2400,7 +2436,11 @@
           <a:lstStyle/>
           <a:p>
             <a:r>
-              <a:rPr lang="en-US" dirty="0"/>
+              <a:rPr lang="ar-SA" dirty="0">
+                <a:latin typeface="Amiri" pitchFamily="2" charset="-78"/>
+                <a:ea typeface="Amiri" pitchFamily="2" charset="-78"/>
+                <a:cs typeface="Amiri" pitchFamily="2" charset="-78"/>
+              </a:rPr>
               <a:t>LANGUAGE BANK (2 min) — comparatives on the afʿal pattern: أَسْرَعُ مِنْ · أَرْخَصُ مِنْ · أَغْلَى مِنْ. Longer adjectives: أَكْثَرُ ازْدِحَامًا. Directions use the imperative.</a:t>
             </a:r>
             <a:endParaRPr lang="en-US" dirty="0"/>
@@ -2576,7 +2616,11 @@
           <a:lstStyle/>
           <a:p>
             <a:r>
-              <a:rPr lang="en-US" dirty="0"/>
+              <a:rPr lang="ar-SA" dirty="0">
+                <a:latin typeface="Amiri" pitchFamily="2" charset="-78"/>
+                <a:ea typeface="Amiri" pitchFamily="2" charset="-78"/>
+                <a:cs typeface="Amiri" pitchFamily="2" charset="-78"/>
+              </a:rPr>
               <a:t>ROLE PLAY A (Core) — a new classmate.
 SET-UP IN THE BREAKOUT ROOM: A = examiner (reads the left column ONLY — the questions, in order), B = candidate (sees the task column; Core may use the help column), C = observer (ticks the feedback checklist). 1 minute preparation, about 3 minutes speaking, 1 minute feedback, then rotate.
 Task ! is the unexpected question: in the exam the candidate has not seen it — the examiner should read it without warning.
@@ -2668,7 +2712,11 @@
           <a:lstStyle/>
           <a:p>
             <a:r>
-              <a:rPr lang="en-US" dirty="0"/>
+              <a:rPr lang="ar-SA" dirty="0">
+                <a:latin typeface="Amiri" pitchFamily="2" charset="-78"/>
+                <a:ea typeface="Amiri" pitchFamily="2" charset="-78"/>
+                <a:cs typeface="Amiri" pitchFamily="2" charset="-78"/>
+              </a:rPr>
               <a:t>ROLE PLAY B (Core+) — at the train station.
 SET-UP IN THE BREAKOUT ROOM: A = examiner (reads the left column ONLY — the questions, in order), B = candidate (sees the task column; Core may use the help column), C = observer (ticks the feedback checklist). 1 minute preparation, about 3 minutes speaking, 1 minute feedback, then rotate.
 Task ! is the unexpected question: in the exam the candidate has not seen it — the examiner should read it without warning.
@@ -3156,6 +3204,7 @@
                   <a:srgbClr val="D4AF37"/>
                 </a:solidFill>
                 <a:latin typeface="Amiri" pitchFamily="2" charset="-78"/>
+                <a:ea typeface="Amiri" pitchFamily="2" charset="-78"/>
                 <a:cs typeface="Amiri" pitchFamily="2" charset="-78"/>
               </a:rPr>
               <a:t>م</a:t>
@@ -3362,6 +3411,7 @@
                   <a:srgbClr val="D4AF37"/>
                 </a:solidFill>
                 <a:latin typeface="Amiri" pitchFamily="2" charset="-78"/>
+                <a:ea typeface="Amiri" pitchFamily="2" charset="-78"/>
                 <a:cs typeface="Amiri" pitchFamily="2" charset="-78"/>
               </a:rPr>
               <a:t>وَرْشَةُ التَّحَدُّثِ — المُوَاصَلَاتُ اليَوْمِيَّةُ</a:t>
@@ -3819,6 +3869,7 @@
                   <a:srgbClr val="D4AF37"/>
                 </a:solidFill>
                 <a:latin typeface="Amiri" pitchFamily="2" charset="-78"/>
+                <a:ea typeface="Amiri" pitchFamily="2" charset="-78"/>
                 <a:cs typeface="Amiri" pitchFamily="2" charset="-78"/>
               </a:rPr>
               <a:t>م</a:t>
@@ -4139,6 +4190,7 @@
                   <a:srgbClr val="8A6D1E"/>
                 </a:solidFill>
                 <a:latin typeface="Amiri" pitchFamily="2" charset="-78"/>
+                <a:ea typeface="Amiri" pitchFamily="2" charset="-78"/>
                 <a:cs typeface="Amiri" pitchFamily="2" charset="-78"/>
               </a:rPr>
               <a:t>أَسْأَلُ عَنِ الطَّرِيقِ</a:t>
@@ -4419,6 +4471,7 @@
                   <a:srgbClr val="1B3B6F"/>
                 </a:solidFill>
                 <a:latin typeface="Amiri" pitchFamily="2" charset="-78"/>
+                <a:ea typeface="Amiri" pitchFamily="2" charset="-78"/>
                 <a:cs typeface="Amiri" pitchFamily="2" charset="-78"/>
               </a:rPr>
               <a:t>لَوْ سَمَحْتَ، كَيْفَ أَصِلُ إِلَى …؟</a:t>
@@ -4495,6 +4548,7 @@
                   <a:srgbClr val="1B3B6F"/>
                 </a:solidFill>
                 <a:latin typeface="Amiri" pitchFamily="2" charset="-78"/>
+                <a:ea typeface="Amiri" pitchFamily="2" charset="-78"/>
                 <a:cs typeface="Amiri" pitchFamily="2" charset="-78"/>
               </a:rPr>
               <a:t>هَلْ تَحْتَاجُ إِلَى مُسَاعَدَةٍ؟</a:t>
@@ -4598,6 +4652,7 @@
                   <a:srgbClr val="1B3B6F"/>
                 </a:solidFill>
                 <a:latin typeface="Amiri" pitchFamily="2" charset="-78"/>
+                <a:ea typeface="Amiri" pitchFamily="2" charset="-78"/>
                 <a:cs typeface="Amiri" pitchFamily="2" charset="-78"/>
               </a:rPr>
               <a:t>إِذَنْ، إِلَى الأَمَامِ ثُمَّ …</a:t>
@@ -4674,6 +4729,7 @@
                   <a:srgbClr val="1B3B6F"/>
                 </a:solidFill>
                 <a:latin typeface="Amiri" pitchFamily="2" charset="-78"/>
+                <a:ea typeface="Amiri" pitchFamily="2" charset="-78"/>
                 <a:cs typeface="Amiri" pitchFamily="2" charset="-78"/>
               </a:rPr>
               <a:t>اذْهَبْ إِلَى الأَمَامِ، ثُمَّ انْعَطِفْ يَمِينًا عِنْدَ البَنْكِ.</a:t>
@@ -4777,6 +4833,7 @@
                   <a:srgbClr val="1B3B6F"/>
                 </a:solidFill>
                 <a:latin typeface="Amiri" pitchFamily="2" charset="-78"/>
+                <a:ea typeface="Amiri" pitchFamily="2" charset="-78"/>
                 <a:cs typeface="Amiri" pitchFamily="2" charset="-78"/>
               </a:rPr>
               <a:t>هَلْ هُوَ بَعِيدٌ؟ هَلْ أَمْشِي أَمْ …؟</a:t>
@@ -4853,6 +4910,7 @@
                   <a:srgbClr val="1B3B6F"/>
                 </a:solidFill>
                 <a:latin typeface="Amiri" pitchFamily="2" charset="-78"/>
+                <a:ea typeface="Amiri" pitchFamily="2" charset="-78"/>
                 <a:cs typeface="Amiri" pitchFamily="2" charset="-78"/>
               </a:rPr>
               <a:t>صَحِيحٌ. وَالمُتْحَفُ عَلَى اليَسَارِ.</a:t>
@@ -4956,6 +5014,7 @@
                   <a:srgbClr val="1B3B6F"/>
                 </a:solidFill>
                 <a:latin typeface="Amiri" pitchFamily="2" charset="-78"/>
+                <a:ea typeface="Amiri" pitchFamily="2" charset="-78"/>
                 <a:cs typeface="Amiri" pitchFamily="2" charset="-78"/>
               </a:rPr>
               <a:t>سَأَمْشِي لِأَنَّ … أَجْمَلُ / أَرْخَصُ</a:t>
@@ -5032,6 +5091,7 @@
                   <a:srgbClr val="1B3B6F"/>
                 </a:solidFill>
                 <a:latin typeface="Amiri" pitchFamily="2" charset="-78"/>
+                <a:ea typeface="Amiri" pitchFamily="2" charset="-78"/>
                 <a:cs typeface="Amiri" pitchFamily="2" charset="-78"/>
               </a:rPr>
               <a:t>عَشْرُ دَقَائِقَ مَشْيًا، أَوْ مَحَطَّتَانِ بِالحَافِلَةِ.</a:t>
@@ -5135,6 +5195,7 @@
                   <a:srgbClr val="1B3B6F"/>
                 </a:solidFill>
                 <a:latin typeface="Amiri" pitchFamily="2" charset="-78"/>
+                <a:ea typeface="Amiri" pitchFamily="2" charset="-78"/>
                 <a:cs typeface="Amiri" pitchFamily="2" charset="-78"/>
               </a:rPr>
               <a:t>أَنَا مِنْ … وَصَلْتُ بِالطَّائِرَةِ …</a:t>
@@ -5211,6 +5272,7 @@
                   <a:srgbClr val="1B3B6F"/>
                 </a:solidFill>
                 <a:latin typeface="Amiri" pitchFamily="2" charset="-78"/>
+                <a:ea typeface="Amiri" pitchFamily="2" charset="-78"/>
                 <a:cs typeface="Amiri" pitchFamily="2" charset="-78"/>
               </a:rPr>
               <a:t>مِنْ أَيْنَ أَنْتَ؟ وَكَيْفَ وَصَلْتَ إِلَى هُنَا؟</a:t>
@@ -5420,6 +5482,7 @@
                   <a:srgbClr val="D4AF37"/>
                 </a:solidFill>
                 <a:latin typeface="Amiri" pitchFamily="2" charset="-78"/>
+                <a:ea typeface="Amiri" pitchFamily="2" charset="-78"/>
                 <a:cs typeface="Amiri" pitchFamily="2" charset="-78"/>
               </a:rPr>
               <a:t>م</a:t>
@@ -5740,6 +5803,7 @@
                   <a:srgbClr val="8A6D1E"/>
                 </a:solidFill>
                 <a:latin typeface="Amiri" pitchFamily="2" charset="-78"/>
+                <a:ea typeface="Amiri" pitchFamily="2" charset="-78"/>
                 <a:cs typeface="Amiri" pitchFamily="2" charset="-78"/>
               </a:rPr>
               <a:t>المُوَاصَلَاتُ فِي مَدِينَتِكَ</a:t>
@@ -6020,6 +6084,7 @@
                   <a:srgbClr val="1B3B6F"/>
                 </a:solidFill>
                 <a:latin typeface="Amiri" pitchFamily="2" charset="-78"/>
+                <a:ea typeface="Amiri" pitchFamily="2" charset="-78"/>
                 <a:cs typeface="Amiri" pitchFamily="2" charset="-78"/>
               </a:rPr>
               <a:t>الحَافِلَاتُ … أَمَّا القِطَارُ فَأَسْرَعُ …</a:t>
@@ -6096,6 +6161,7 @@
                   <a:srgbClr val="1B3B6F"/>
                 </a:solidFill>
                 <a:latin typeface="Amiri" pitchFamily="2" charset="-78"/>
+                <a:ea typeface="Amiri" pitchFamily="2" charset="-78"/>
                 <a:cs typeface="Amiri" pitchFamily="2" charset="-78"/>
               </a:rPr>
               <a:t>مَا رَأْيُكَ فِي المُوَاصَلَاتِ العَامَّةِ فِي مَدِينَتِكَ؟</a:t>
@@ -6199,6 +6265,7 @@
                   <a:srgbClr val="1B3B6F"/>
                 </a:solidFill>
                 <a:latin typeface="Amiri" pitchFamily="2" charset="-78"/>
+                <a:ea typeface="Amiri" pitchFamily="2" charset="-78"/>
                 <a:cs typeface="Amiri" pitchFamily="2" charset="-78"/>
               </a:rPr>
               <a:t>قَبْلَ … كَانَ … أَمَّا الآنَ …</a:t>
@@ -6275,6 +6342,7 @@
                   <a:srgbClr val="1B3B6F"/>
                 </a:solidFill>
                 <a:latin typeface="Amiri" pitchFamily="2" charset="-78"/>
+                <a:ea typeface="Amiri" pitchFamily="2" charset="-78"/>
                 <a:cs typeface="Amiri" pitchFamily="2" charset="-78"/>
               </a:rPr>
               <a:t>هَلْ تَغَيَّرَتِ المُوَاصَلَاتُ فِي السَّنَوَاتِ الأَخِيرَةِ؟</a:t>
@@ -6378,6 +6446,7 @@
                   <a:srgbClr val="1B3B6F"/>
                 </a:solidFill>
                 <a:latin typeface="Amiri" pitchFamily="2" charset="-78"/>
+                <a:ea typeface="Amiri" pitchFamily="2" charset="-78"/>
                 <a:cs typeface="Amiri" pitchFamily="2" charset="-78"/>
               </a:rPr>
               <a:t>لِأَنَّهَا … وَلِأَنَّ …</a:t>
@@ -6454,6 +6523,7 @@
                   <a:srgbClr val="1B3B6F"/>
                 </a:solidFill>
                 <a:latin typeface="Amiri" pitchFamily="2" charset="-78"/>
+                <a:ea typeface="Amiri" pitchFamily="2" charset="-78"/>
                 <a:cs typeface="Amiri" pitchFamily="2" charset="-78"/>
               </a:rPr>
               <a:t>لِمَاذَا يُفَضِّلُ النَّاسُ السَّيَّارَةَ فِي رَأْيِكَ؟</a:t>
@@ -6557,6 +6627,7 @@
                   <a:srgbClr val="1B3B6F"/>
                 </a:solidFill>
                 <a:latin typeface="Amiri" pitchFamily="2" charset="-78"/>
+                <a:ea typeface="Amiri" pitchFamily="2" charset="-78"/>
                 <a:cs typeface="Amiri" pitchFamily="2" charset="-78"/>
               </a:rPr>
               <a:t>صَحِيحٌ أَنَّ … غَيْرَ أَنَّ …</a:t>
@@ -6633,6 +6704,7 @@
                   <a:srgbClr val="1B3B6F"/>
                 </a:solidFill>
                 <a:latin typeface="Amiri" pitchFamily="2" charset="-78"/>
+                <a:ea typeface="Amiri" pitchFamily="2" charset="-78"/>
                 <a:cs typeface="Amiri" pitchFamily="2" charset="-78"/>
               </a:rPr>
               <a:t>هَلْ يَجِبُ أَنْ تَكُونَ المُوَاصَلَاتُ مَجَّانِيَّةً لِلطُّلَّابِ؟</a:t>
@@ -6736,6 +6808,7 @@
                   <a:srgbClr val="1B3B6F"/>
                 </a:solidFill>
                 <a:latin typeface="Amiri" pitchFamily="2" charset="-78"/>
+                <a:ea typeface="Amiri" pitchFamily="2" charset="-78"/>
                 <a:cs typeface="Amiri" pitchFamily="2" charset="-78"/>
               </a:rPr>
               <a:t>لَوْ كَانَ عِنْدِي …، لَبَنَيْتُ …</a:t>
@@ -6812,6 +6885,7 @@
                   <a:srgbClr val="1B3B6F"/>
                 </a:solidFill>
                 <a:latin typeface="Amiri" pitchFamily="2" charset="-78"/>
+                <a:ea typeface="Amiri" pitchFamily="2" charset="-78"/>
                 <a:cs typeface="Amiri" pitchFamily="2" charset="-78"/>
               </a:rPr>
               <a:t>لَوْ كَانَ عِنْدَكَ مِلْيُونُ دِينَارٍ لِلْمُوَاصَلَاتِ، مَاذَا تَفْعَلُ؟</a:t>
@@ -7021,6 +7095,7 @@
                   <a:srgbClr val="D4AF37"/>
                 </a:solidFill>
                 <a:latin typeface="Amiri" pitchFamily="2" charset="-78"/>
+                <a:ea typeface="Amiri" pitchFamily="2" charset="-78"/>
                 <a:cs typeface="Amiri" pitchFamily="2" charset="-78"/>
               </a:rPr>
               <a:t>م</a:t>
@@ -7341,6 +7416,7 @@
                   <a:srgbClr val="8A6D1E"/>
                 </a:solidFill>
                 <a:latin typeface="Amiri" pitchFamily="2" charset="-78"/>
+                <a:ea typeface="Amiri" pitchFamily="2" charset="-78"/>
                 <a:cs typeface="Amiri" pitchFamily="2" charset="-78"/>
               </a:rPr>
               <a:t>وَرَقَةُ المُلَاحِظِ</a:t>
@@ -8811,6 +8887,7 @@
                   <a:srgbClr val="D4AF37"/>
                 </a:solidFill>
                 <a:latin typeface="Amiri" pitchFamily="2" charset="-78"/>
+                <a:ea typeface="Amiri" pitchFamily="2" charset="-78"/>
                 <a:cs typeface="Amiri" pitchFamily="2" charset="-78"/>
               </a:rPr>
               <a:t>م</a:t>
@@ -9131,6 +9208,7 @@
                   <a:srgbClr val="8A6D1E"/>
                 </a:solidFill>
                 <a:latin typeface="Amiri" pitchFamily="2" charset="-78"/>
+                <a:ea typeface="Amiri" pitchFamily="2" charset="-78"/>
                 <a:cs typeface="Amiri" pitchFamily="2" charset="-78"/>
               </a:rPr>
               <a:t>نَمُوذَجُ الإِجَابَةِ</a:t>
@@ -9373,6 +9451,7 @@
                   <a:srgbClr val="1B3B6F"/>
                 </a:solidFill>
                 <a:latin typeface="Amiri" pitchFamily="2" charset="-78"/>
+                <a:ea typeface="Amiri" pitchFamily="2" charset="-78"/>
                 <a:cs typeface="Amiri" pitchFamily="2" charset="-78"/>
               </a:rPr>
               <a:t>أَذْهَبُ إِلَى المَدْرَسَةِ بِالحَافِلَةِ.</a:t>
@@ -9449,6 +9528,7 @@
                   <a:srgbClr val="1B3B6F"/>
                 </a:solidFill>
                 <a:latin typeface="Amiri" pitchFamily="2" charset="-78"/>
+                <a:ea typeface="Amiri" pitchFamily="2" charset="-78"/>
                 <a:cs typeface="Amiri" pitchFamily="2" charset="-78"/>
               </a:rPr>
               <a:t>كَيْفَ تَذْهَبُ إِلَى المَدْرَسَةِ؟</a:t>
@@ -9552,6 +9632,7 @@
                   <a:srgbClr val="1B3B6F"/>
                 </a:solidFill>
                 <a:latin typeface="Amiri" pitchFamily="2" charset="-78"/>
+                <a:ea typeface="Amiri" pitchFamily="2" charset="-78"/>
                 <a:cs typeface="Amiri" pitchFamily="2" charset="-78"/>
               </a:rPr>
               <a:t>أَخْرُجُ مِنَ البَيْتِ فِي السَّاعَةِ السَّابِعَةِ وَالرُّبْعِ.</a:t>
@@ -9628,6 +9709,7 @@
                   <a:srgbClr val="1B3B6F"/>
                 </a:solidFill>
                 <a:latin typeface="Amiri" pitchFamily="2" charset="-78"/>
+                <a:ea typeface="Amiri" pitchFamily="2" charset="-78"/>
                 <a:cs typeface="Amiri" pitchFamily="2" charset="-78"/>
               </a:rPr>
               <a:t>مَتَى تَخْرُجُ مِنَ البَيْتِ؟</a:t>
@@ -9731,6 +9813,7 @@
                   <a:srgbClr val="1B3B6F"/>
                 </a:solidFill>
                 <a:latin typeface="Amiri" pitchFamily="2" charset="-78"/>
+                <a:ea typeface="Amiri" pitchFamily="2" charset="-78"/>
                 <a:cs typeface="Amiri" pitchFamily="2" charset="-78"/>
               </a:rPr>
               <a:t>تَسْتَغْرِقُ الرِّحْلَةُ عِشْرِينَ دَقِيقَةً تَقْرِيبًا.</a:t>
@@ -9807,6 +9890,7 @@
                   <a:srgbClr val="1B3B6F"/>
                 </a:solidFill>
                 <a:latin typeface="Amiri" pitchFamily="2" charset="-78"/>
+                <a:ea typeface="Amiri" pitchFamily="2" charset="-78"/>
                 <a:cs typeface="Amiri" pitchFamily="2" charset="-78"/>
               </a:rPr>
               <a:t>كَمْ دَقِيقَةً تَسْتَغْرِقُ الرِّحْلَةُ؟</a:t>
@@ -9910,6 +9994,7 @@
                   <a:srgbClr val="1B3B6F"/>
                 </a:solidFill>
                 <a:latin typeface="Amiri" pitchFamily="2" charset="-78"/>
+                <a:ea typeface="Amiri" pitchFamily="2" charset="-78"/>
                 <a:cs typeface="Amiri" pitchFamily="2" charset="-78"/>
               </a:rPr>
               <a:t>أَذْهَبُ مَعَ أَخِي وَصَدِيقِي سَامِرٍ.</a:t>
@@ -9986,6 +10071,7 @@
                   <a:srgbClr val="1B3B6F"/>
                 </a:solidFill>
                 <a:latin typeface="Amiri" pitchFamily="2" charset="-78"/>
+                <a:ea typeface="Amiri" pitchFamily="2" charset="-78"/>
                 <a:cs typeface="Amiri" pitchFamily="2" charset="-78"/>
               </a:rPr>
               <a:t>مَعَ مَنْ تَذْهَبُ؟</a:t>
@@ -10089,6 +10175,7 @@
                   <a:srgbClr val="1B3B6F"/>
                 </a:solidFill>
                 <a:latin typeface="Amiri" pitchFamily="2" charset="-78"/>
+                <a:ea typeface="Amiri" pitchFamily="2" charset="-78"/>
                 <a:cs typeface="Amiri" pitchFamily="2" charset="-78"/>
               </a:rPr>
               <a:t>نَعَمْ، أُحِبُّهَا لِأَنَّهَا رَخِيصَةٌ، لٰكِنَّهَا مُزْدَحِمَةٌ أَحْيَانًا.</a:t>
@@ -10165,6 +10252,7 @@
                   <a:srgbClr val="1B3B6F"/>
                 </a:solidFill>
                 <a:latin typeface="Amiri" pitchFamily="2" charset="-78"/>
+                <a:ea typeface="Amiri" pitchFamily="2" charset="-78"/>
                 <a:cs typeface="Amiri" pitchFamily="2" charset="-78"/>
               </a:rPr>
               <a:t>هَلْ تُحِبُّ الحَافِلَةَ؟</a:t>
@@ -10374,6 +10462,7 @@
                   <a:srgbClr val="D4AF37"/>
                 </a:solidFill>
                 <a:latin typeface="Amiri" pitchFamily="2" charset="-78"/>
+                <a:ea typeface="Amiri" pitchFamily="2" charset="-78"/>
                 <a:cs typeface="Amiri" pitchFamily="2" charset="-78"/>
               </a:rPr>
               <a:t>م</a:t>
@@ -10694,6 +10783,7 @@
                   <a:srgbClr val="8A6D1E"/>
                 </a:solidFill>
                 <a:latin typeface="Amiri" pitchFamily="2" charset="-78"/>
+                <a:ea typeface="Amiri" pitchFamily="2" charset="-78"/>
                 <a:cs typeface="Amiri" pitchFamily="2" charset="-78"/>
               </a:rPr>
               <a:t>نَمُوذَجُ الإِجَابَةِ</a:t>
@@ -10936,6 +11026,7 @@
                   <a:srgbClr val="1B3B6F"/>
                 </a:solidFill>
                 <a:latin typeface="Amiri" pitchFamily="2" charset="-78"/>
+                <a:ea typeface="Amiri" pitchFamily="2" charset="-78"/>
                 <a:cs typeface="Amiri" pitchFamily="2" charset="-78"/>
               </a:rPr>
               <a:t>أُرِيدُ تَذْكِرَةً إِلَى الإِسْكَنْدَرِيَّةِ، مِنْ فَضْلِكَ.</a:t>
@@ -11012,6 +11103,7 @@
                   <a:srgbClr val="1B3B6F"/>
                 </a:solidFill>
                 <a:latin typeface="Amiri" pitchFamily="2" charset="-78"/>
+                <a:ea typeface="Amiri" pitchFamily="2" charset="-78"/>
                 <a:cs typeface="Amiri" pitchFamily="2" charset="-78"/>
               </a:rPr>
               <a:t>أَهْلًا، إِلَى أَيْنَ؟</a:t>
@@ -11115,6 +11207,7 @@
                   <a:srgbClr val="1B3B6F"/>
                 </a:solidFill>
                 <a:latin typeface="Amiri" pitchFamily="2" charset="-78"/>
+                <a:ea typeface="Amiri" pitchFamily="2" charset="-78"/>
                 <a:cs typeface="Amiri" pitchFamily="2" charset="-78"/>
               </a:rPr>
               <a:t>ذَهَابٌ وَعَوْدَةٌ، لِأَنِّي سَأَرْجِعُ يَوْمَ الجُمُعَةِ.</a:t>
@@ -11191,6 +11284,7 @@
                   <a:srgbClr val="1B3B6F"/>
                 </a:solidFill>
                 <a:latin typeface="Amiri" pitchFamily="2" charset="-78"/>
+                <a:ea typeface="Amiri" pitchFamily="2" charset="-78"/>
                 <a:cs typeface="Amiri" pitchFamily="2" charset="-78"/>
               </a:rPr>
               <a:t>ذَهَابٌ فَقَطْ أَمْ ذَهَابٌ وَعَوْدَةٌ؟</a:t>
@@ -11294,6 +11388,7 @@
                   <a:srgbClr val="1B3B6F"/>
                 </a:solidFill>
                 <a:latin typeface="Amiri" pitchFamily="2" charset="-78"/>
+                <a:ea typeface="Amiri" pitchFamily="2" charset="-78"/>
                 <a:cs typeface="Amiri" pitchFamily="2" charset="-78"/>
               </a:rPr>
               <a:t>أَيُّ قِطَارٍ أَسْرَعُ، مِنْ فَضْلِكَ؟</a:t>
@@ -11370,6 +11465,7 @@
                   <a:srgbClr val="1B3B6F"/>
                 </a:solidFill>
                 <a:latin typeface="Amiri" pitchFamily="2" charset="-78"/>
+                <a:ea typeface="Amiri" pitchFamily="2" charset="-78"/>
                 <a:cs typeface="Amiri" pitchFamily="2" charset="-78"/>
               </a:rPr>
               <a:t>هُنَاكَ قِطَارٌ فِي التَّاسِعَةِ وَقِطَارٌ فِي الحَادِيَةَ عَشْرَةَ.</a:t>
@@ -11473,6 +11569,7 @@
                   <a:srgbClr val="1B3B6F"/>
                 </a:solidFill>
                 <a:latin typeface="Amiri" pitchFamily="2" charset="-78"/>
+                <a:ea typeface="Amiri" pitchFamily="2" charset="-78"/>
                 <a:cs typeface="Amiri" pitchFamily="2" charset="-78"/>
               </a:rPr>
               <a:t>سَآخُذُ قِطَارَ التَّاسِعَةِ إِذَنْ. بِكَمِ التَّذْكِرَةُ؟</a:t>
@@ -11549,6 +11646,7 @@
                   <a:srgbClr val="1B3B6F"/>
                 </a:solidFill>
                 <a:latin typeface="Amiri" pitchFamily="2" charset="-78"/>
+                <a:ea typeface="Amiri" pitchFamily="2" charset="-78"/>
                 <a:cs typeface="Amiri" pitchFamily="2" charset="-78"/>
               </a:rPr>
               <a:t>قِطَارُ التَّاسِعَةِ يَصِلُ بَعْدَ سَاعَتَيْنِ.</a:t>
@@ -11652,6 +11750,7 @@
                   <a:srgbClr val="1B3B6F"/>
                 </a:solidFill>
                 <a:latin typeface="Amiri" pitchFamily="2" charset="-78"/>
+                <a:ea typeface="Amiri" pitchFamily="2" charset="-78"/>
                 <a:cs typeface="Amiri" pitchFamily="2" charset="-78"/>
               </a:rPr>
               <a:t>بِالبِطَاقَةِ، مِنْ فَضْلِكَ.</a:t>
@@ -11728,6 +11827,7 @@
                   <a:srgbClr val="1B3B6F"/>
                 </a:solidFill>
                 <a:latin typeface="Amiri" pitchFamily="2" charset="-78"/>
+                <a:ea typeface="Amiri" pitchFamily="2" charset="-78"/>
                 <a:cs typeface="Amiri" pitchFamily="2" charset="-78"/>
               </a:rPr>
               <a:t>كَيْفَ تُرِيدُ أَنْ تَدْفَعَ؟</a:t>
@@ -11937,6 +12037,7 @@
                   <a:srgbClr val="D4AF37"/>
                 </a:solidFill>
                 <a:latin typeface="Amiri" pitchFamily="2" charset="-78"/>
+                <a:ea typeface="Amiri" pitchFamily="2" charset="-78"/>
                 <a:cs typeface="Amiri" pitchFamily="2" charset="-78"/>
               </a:rPr>
               <a:t>م</a:t>
@@ -12257,6 +12358,7 @@
                   <a:srgbClr val="8A6D1E"/>
                 </a:solidFill>
                 <a:latin typeface="Amiri" pitchFamily="2" charset="-78"/>
+                <a:ea typeface="Amiri" pitchFamily="2" charset="-78"/>
                 <a:cs typeface="Amiri" pitchFamily="2" charset="-78"/>
               </a:rPr>
               <a:t>نَمُوذَجُ الإِجَابَةِ</a:t>
@@ -12499,6 +12601,7 @@
                   <a:srgbClr val="1B3B6F"/>
                 </a:solidFill>
                 <a:latin typeface="Amiri" pitchFamily="2" charset="-78"/>
+                <a:ea typeface="Amiri" pitchFamily="2" charset="-78"/>
                 <a:cs typeface="Amiri" pitchFamily="2" charset="-78"/>
               </a:rPr>
               <a:t>نَعَمْ، لَوْ سَمَحْتَ، كَيْفَ أَصِلُ إِلَى المُتْحَفِ الوَطَنِيِّ؟</a:t>
@@ -12575,6 +12678,7 @@
                   <a:srgbClr val="1B3B6F"/>
                 </a:solidFill>
                 <a:latin typeface="Amiri" pitchFamily="2" charset="-78"/>
+                <a:ea typeface="Amiri" pitchFamily="2" charset="-78"/>
                 <a:cs typeface="Amiri" pitchFamily="2" charset="-78"/>
               </a:rPr>
               <a:t>هَلْ تَحْتَاجُ إِلَى مُسَاعَدَةٍ؟</a:t>
@@ -12678,6 +12782,7 @@
                   <a:srgbClr val="1B3B6F"/>
                 </a:solidFill>
                 <a:latin typeface="Amiri" pitchFamily="2" charset="-78"/>
+                <a:ea typeface="Amiri" pitchFamily="2" charset="-78"/>
                 <a:cs typeface="Amiri" pitchFamily="2" charset="-78"/>
               </a:rPr>
               <a:t>إِذَنْ، أَذْهَبُ إِلَى الأَمَامِ، ثُمَّ أَنْعَطِفُ يَمِينًا عِنْدَ البَنْكِ. صَحِيحٌ؟</a:t>
@@ -12754,6 +12859,7 @@
                   <a:srgbClr val="1B3B6F"/>
                 </a:solidFill>
                 <a:latin typeface="Amiri" pitchFamily="2" charset="-78"/>
+                <a:ea typeface="Amiri" pitchFamily="2" charset="-78"/>
                 <a:cs typeface="Amiri" pitchFamily="2" charset="-78"/>
               </a:rPr>
               <a:t>اذْهَبْ إِلَى الأَمَامِ، ثُمَّ انْعَطِفْ يَمِينًا عِنْدَ البَنْكِ.</a:t>
@@ -12857,6 +12963,7 @@
                   <a:srgbClr val="1B3B6F"/>
                 </a:solidFill>
                 <a:latin typeface="Amiri" pitchFamily="2" charset="-78"/>
+                <a:ea typeface="Amiri" pitchFamily="2" charset="-78"/>
                 <a:cs typeface="Amiri" pitchFamily="2" charset="-78"/>
               </a:rPr>
               <a:t>هَلْ هُوَ بَعِيدٌ؟ هَلْ أَمْشِي أَمْ آخُذُ الحَافِلَةَ؟</a:t>
@@ -12933,6 +13040,7 @@
                   <a:srgbClr val="1B3B6F"/>
                 </a:solidFill>
                 <a:latin typeface="Amiri" pitchFamily="2" charset="-78"/>
+                <a:ea typeface="Amiri" pitchFamily="2" charset="-78"/>
                 <a:cs typeface="Amiri" pitchFamily="2" charset="-78"/>
               </a:rPr>
               <a:t>صَحِيحٌ. وَالمُتْحَفُ عَلَى اليَسَارِ.</a:t>
@@ -13036,6 +13144,7 @@
                   <a:srgbClr val="1B3B6F"/>
                 </a:solidFill>
                 <a:latin typeface="Amiri" pitchFamily="2" charset="-78"/>
+                <a:ea typeface="Amiri" pitchFamily="2" charset="-78"/>
                 <a:cs typeface="Amiri" pitchFamily="2" charset="-78"/>
               </a:rPr>
               <a:t>سَأَمْشِي، لِأَنَّ الجَوَّ جَمِيلٌ، وَالمَشْيُ أَرْخَصُ مِنَ الحَافِلَةِ.</a:t>
@@ -13112,6 +13221,7 @@
                   <a:srgbClr val="1B3B6F"/>
                 </a:solidFill>
                 <a:latin typeface="Amiri" pitchFamily="2" charset="-78"/>
+                <a:ea typeface="Amiri" pitchFamily="2" charset="-78"/>
                 <a:cs typeface="Amiri" pitchFamily="2" charset="-78"/>
               </a:rPr>
               <a:t>عَشْرُ دَقَائِقَ مَشْيًا، أَوْ مَحَطَّتَانِ بِالحَافِلَةِ.</a:t>
@@ -13215,6 +13325,7 @@
                   <a:srgbClr val="1B3B6F"/>
                 </a:solidFill>
                 <a:latin typeface="Amiri" pitchFamily="2" charset="-78"/>
+                <a:ea typeface="Amiri" pitchFamily="2" charset="-78"/>
                 <a:cs typeface="Amiri" pitchFamily="2" charset="-78"/>
               </a:rPr>
               <a:t>أَنَا مِنْ لَنْدَنَ، وَوَصَلْتُ أَمْسِ بِالطَّائِرَةِ، ثُمَّ رَكِبْتُ القِطَارَ إِلَى وَسَطِ المَدِينَةِ.</a:t>
@@ -13291,6 +13402,7 @@
                   <a:srgbClr val="1B3B6F"/>
                 </a:solidFill>
                 <a:latin typeface="Amiri" pitchFamily="2" charset="-78"/>
+                <a:ea typeface="Amiri" pitchFamily="2" charset="-78"/>
                 <a:cs typeface="Amiri" pitchFamily="2" charset="-78"/>
               </a:rPr>
               <a:t>مِنْ أَيْنَ أَنْتَ؟ وَكَيْفَ وَصَلْتَ إِلَى هُنَا؟</a:t>
@@ -13500,6 +13612,7 @@
                   <a:srgbClr val="D4AF37"/>
                 </a:solidFill>
                 <a:latin typeface="Amiri" pitchFamily="2" charset="-78"/>
+                <a:ea typeface="Amiri" pitchFamily="2" charset="-78"/>
                 <a:cs typeface="Amiri" pitchFamily="2" charset="-78"/>
               </a:rPr>
               <a:t>م</a:t>
@@ -13820,6 +13933,7 @@
                   <a:srgbClr val="8A6D1E"/>
                 </a:solidFill>
                 <a:latin typeface="Amiri" pitchFamily="2" charset="-78"/>
+                <a:ea typeface="Amiri" pitchFamily="2" charset="-78"/>
                 <a:cs typeface="Amiri" pitchFamily="2" charset="-78"/>
               </a:rPr>
               <a:t>نَمُوذَجُ الإِجَابَةِ</a:t>
@@ -14062,6 +14176,7 @@
                   <a:srgbClr val="1B3B6F"/>
                 </a:solidFill>
                 <a:latin typeface="Amiri" pitchFamily="2" charset="-78"/>
+                <a:ea typeface="Amiri" pitchFamily="2" charset="-78"/>
                 <a:cs typeface="Amiri" pitchFamily="2" charset="-78"/>
               </a:rPr>
               <a:t>الحَافِلَاتُ رَخِيصَةٌ لٰكِنَّهَا بَطِيئَةٌ، أَمَّا القِطَارُ فَأَسْرَعُ بِكَثِيرٍ، غَيْرَ أَنَّهُ غَالٍ.</a:t>
@@ -14138,6 +14253,7 @@
                   <a:srgbClr val="1B3B6F"/>
                 </a:solidFill>
                 <a:latin typeface="Amiri" pitchFamily="2" charset="-78"/>
+                <a:ea typeface="Amiri" pitchFamily="2" charset="-78"/>
                 <a:cs typeface="Amiri" pitchFamily="2" charset="-78"/>
               </a:rPr>
               <a:t>مَا رَأْيُكَ فِي المُوَاصَلَاتِ العَامَّةِ فِي مَدِينَتِكَ؟</a:t>
@@ -14241,6 +14357,7 @@
                   <a:srgbClr val="1B3B6F"/>
                 </a:solidFill>
                 <a:latin typeface="Amiri" pitchFamily="2" charset="-78"/>
+                <a:ea typeface="Amiri" pitchFamily="2" charset="-78"/>
                 <a:cs typeface="Amiri" pitchFamily="2" charset="-78"/>
               </a:rPr>
               <a:t>قَبْلَ خَمْسِ سَنَوَاتٍ كَانَتِ الحَافِلَةُ تَأْتِي كُلَّ سَاعَةٍ، أَمَّا الآنَ فَتَأْتِي كُلَّ عَشْرِ دَقَائِقَ.</a:t>
@@ -14317,6 +14434,7 @@
                   <a:srgbClr val="1B3B6F"/>
                 </a:solidFill>
                 <a:latin typeface="Amiri" pitchFamily="2" charset="-78"/>
+                <a:ea typeface="Amiri" pitchFamily="2" charset="-78"/>
                 <a:cs typeface="Amiri" pitchFamily="2" charset="-78"/>
               </a:rPr>
               <a:t>هَلْ تَغَيَّرَتِ المُوَاصَلَاتُ فِي السَّنَوَاتِ الأَخِيرَةِ؟</a:t>
@@ -14420,6 +14538,7 @@
                   <a:srgbClr val="1B3B6F"/>
                 </a:solidFill>
                 <a:latin typeface="Amiri" pitchFamily="2" charset="-78"/>
+                <a:ea typeface="Amiri" pitchFamily="2" charset="-78"/>
                 <a:cs typeface="Amiri" pitchFamily="2" charset="-78"/>
               </a:rPr>
               <a:t>لِأَنَّهَا مُرِيحَةٌ وَتَصِلُ إِلَى كُلِّ مَكَانٍ، وَلِأَنَّ الحَافِلَاتِ لَا تَعْمَلُ فِي اللَّيْلِ.</a:t>
@@ -14496,6 +14615,7 @@
                   <a:srgbClr val="1B3B6F"/>
                 </a:solidFill>
                 <a:latin typeface="Amiri" pitchFamily="2" charset="-78"/>
+                <a:ea typeface="Amiri" pitchFamily="2" charset="-78"/>
                 <a:cs typeface="Amiri" pitchFamily="2" charset="-78"/>
               </a:rPr>
               <a:t>لِمَاذَا يُفَضِّلُ النَّاسُ السَّيَّارَةَ فِي رَأْيِكَ؟</a:t>
@@ -14599,6 +14719,7 @@
                   <a:srgbClr val="1B3B6F"/>
                 </a:solidFill>
                 <a:latin typeface="Amiri" pitchFamily="2" charset="-78"/>
+                <a:ea typeface="Amiri" pitchFamily="2" charset="-78"/>
                 <a:cs typeface="Amiri" pitchFamily="2" charset="-78"/>
               </a:rPr>
               <a:t>صَحِيحٌ أَنَّ ذٰلِكَ مُكْلِفٌ لِلْبَلَدِيَّةِ، غَيْرَ أَنَّهُ يُقَلِّلُ عَدَدَ السَّيَّارَاتِ وَالتَّلَوُّثَ.</a:t>
@@ -14675,6 +14796,7 @@
                   <a:srgbClr val="1B3B6F"/>
                 </a:solidFill>
                 <a:latin typeface="Amiri" pitchFamily="2" charset="-78"/>
+                <a:ea typeface="Amiri" pitchFamily="2" charset="-78"/>
                 <a:cs typeface="Amiri" pitchFamily="2" charset="-78"/>
               </a:rPr>
               <a:t>هَلْ يَجِبُ أَنْ تَكُونَ المُوَاصَلَاتُ مَجَّانِيَّةً لِلطُّلَّابِ؟</a:t>
@@ -14778,6 +14900,7 @@
                   <a:srgbClr val="1B3B6F"/>
                 </a:solidFill>
                 <a:latin typeface="Amiri" pitchFamily="2" charset="-78"/>
+                <a:ea typeface="Amiri" pitchFamily="2" charset="-78"/>
                 <a:cs typeface="Amiri" pitchFamily="2" charset="-78"/>
               </a:rPr>
               <a:t>لَوْ كَانَ عِنْدِي مِلْيُونُ دِينَارٍ، لَبَنَيْتُ طُرُقًا آمِنَةً لِلدَّرَّاجَاتِ حَوْلَ المَدَارِسِ.</a:t>
@@ -14854,6 +14977,7 @@
                   <a:srgbClr val="1B3B6F"/>
                 </a:solidFill>
                 <a:latin typeface="Amiri" pitchFamily="2" charset="-78"/>
+                <a:ea typeface="Amiri" pitchFamily="2" charset="-78"/>
                 <a:cs typeface="Amiri" pitchFamily="2" charset="-78"/>
               </a:rPr>
               <a:t>لَوْ كَانَ عِنْدَكَ مِلْيُونُ دِينَارٍ لِلْمُوَاصَلَاتِ، مَاذَا تَفْعَلُ؟</a:t>
@@ -15063,6 +15187,7 @@
                   <a:srgbClr val="D4AF37"/>
                 </a:solidFill>
                 <a:latin typeface="Amiri" pitchFamily="2" charset="-78"/>
+                <a:ea typeface="Amiri" pitchFamily="2" charset="-78"/>
                 <a:cs typeface="Amiri" pitchFamily="2" charset="-78"/>
               </a:rPr>
               <a:t>م</a:t>
@@ -15383,6 +15508,7 @@
                   <a:srgbClr val="8A6D1E"/>
                 </a:solidFill>
                 <a:latin typeface="Amiri" pitchFamily="2" charset="-78"/>
+                <a:ea typeface="Amiri" pitchFamily="2" charset="-78"/>
                 <a:cs typeface="Amiri" pitchFamily="2" charset="-78"/>
               </a:rPr>
               <a:t>رِحْلَاتِي اليَوْمِيَّةُ</a:t>
@@ -15663,6 +15789,7 @@
                   <a:srgbClr val="1B3B6F"/>
                 </a:solidFill>
                 <a:latin typeface="Amiri" pitchFamily="2" charset="-78"/>
+                <a:ea typeface="Amiri" pitchFamily="2" charset="-78"/>
                 <a:cs typeface="Amiri" pitchFamily="2" charset="-78"/>
               </a:rPr>
               <a:t>أَذْهَبُ … / أَمْشِي …</a:t>
@@ -15739,6 +15866,7 @@
                   <a:srgbClr val="1B3B6F"/>
                 </a:solidFill>
                 <a:latin typeface="Amiri" pitchFamily="2" charset="-78"/>
+                <a:ea typeface="Amiri" pitchFamily="2" charset="-78"/>
                 <a:cs typeface="Amiri" pitchFamily="2" charset="-78"/>
               </a:rPr>
               <a:t>كَيْفَ تَذْهَبُ إِلَى المَدْرَسَةِ؟</a:t>
@@ -15907,6 +16035,7 @@
                   <a:srgbClr val="1B3B6F"/>
                 </a:solidFill>
                 <a:latin typeface="Amiri" pitchFamily="2" charset="-78"/>
+                <a:ea typeface="Amiri" pitchFamily="2" charset="-78"/>
                 <a:cs typeface="Amiri" pitchFamily="2" charset="-78"/>
               </a:rPr>
               <a:t>تَسْتَغْرِقُ …</a:t>
@@ -15983,6 +16112,7 @@
                   <a:srgbClr val="1B3B6F"/>
                 </a:solidFill>
                 <a:latin typeface="Amiri" pitchFamily="2" charset="-78"/>
+                <a:ea typeface="Amiri" pitchFamily="2" charset="-78"/>
                 <a:cs typeface="Amiri" pitchFamily="2" charset="-78"/>
               </a:rPr>
               <a:t>كَمْ دَقِيقَةً تَسْتَغْرِقُ الرِّحْلَةُ؟</a:t>
@@ -16151,6 +16281,7 @@
                   <a:srgbClr val="1B3B6F"/>
                 </a:solidFill>
                 <a:latin typeface="Amiri" pitchFamily="2" charset="-78"/>
+                <a:ea typeface="Amiri" pitchFamily="2" charset="-78"/>
                 <a:cs typeface="Amiri" pitchFamily="2" charset="-78"/>
               </a:rPr>
               <a:t>أُفَضِّلُ … لِأَنَّ …</a:t>
@@ -16227,6 +16358,7 @@
                   <a:srgbClr val="1B3B6F"/>
                 </a:solidFill>
                 <a:latin typeface="Amiri" pitchFamily="2" charset="-78"/>
+                <a:ea typeface="Amiri" pitchFamily="2" charset="-78"/>
                 <a:cs typeface="Amiri" pitchFamily="2" charset="-78"/>
               </a:rPr>
               <a:t>مَا وَسِيلَةُ المُوَاصَلَاتِ المُفَضَّلَةُ عِنْدَكَ؟</a:t>
@@ -16395,6 +16527,7 @@
                   <a:srgbClr val="1B3B6F"/>
                 </a:solidFill>
                 <a:latin typeface="Amiri" pitchFamily="2" charset="-78"/>
+                <a:ea typeface="Amiri" pitchFamily="2" charset="-78"/>
                 <a:cs typeface="Amiri" pitchFamily="2" charset="-78"/>
               </a:rPr>
               <a:t>نَعَمْ / لَا، …</a:t>
@@ -16471,6 +16604,7 @@
                   <a:srgbClr val="1B3B6F"/>
                 </a:solidFill>
                 <a:latin typeface="Amiri" pitchFamily="2" charset="-78"/>
+                <a:ea typeface="Amiri" pitchFamily="2" charset="-78"/>
                 <a:cs typeface="Amiri" pitchFamily="2" charset="-78"/>
               </a:rPr>
               <a:t>هَلْ عِنْدَكَ دَرَّاجَةٌ؟</a:t>
@@ -16639,6 +16773,7 @@
                   <a:srgbClr val="1B3B6F"/>
                 </a:solidFill>
                 <a:latin typeface="Amiri" pitchFamily="2" charset="-78"/>
+                <a:ea typeface="Amiri" pitchFamily="2" charset="-78"/>
                 <a:cs typeface="Amiri" pitchFamily="2" charset="-78"/>
               </a:rPr>
               <a:t>يَذْهَبُ أَبِي بِالسَّيَّارَةِ …</a:t>
@@ -16715,6 +16850,7 @@
                   <a:srgbClr val="1B3B6F"/>
                 </a:solidFill>
                 <a:latin typeface="Amiri" pitchFamily="2" charset="-78"/>
+                <a:ea typeface="Amiri" pitchFamily="2" charset="-78"/>
                 <a:cs typeface="Amiri" pitchFamily="2" charset="-78"/>
               </a:rPr>
               <a:t>كَيْفَ يَذْهَبُ أَبُوكَ إِلَى العَمَلِ؟</a:t>
@@ -16869,6 +17005,7 @@
                   <a:srgbClr val="1B3B6F"/>
                 </a:solidFill>
                 <a:latin typeface="Amiri" pitchFamily="2" charset="-78"/>
+                <a:ea typeface="Amiri" pitchFamily="2" charset="-78"/>
                 <a:cs typeface="Amiri" pitchFamily="2" charset="-78"/>
               </a:rPr>
               <a:t>عَفْوًا، هَلْ يُمْكِنُ أَنْ تُعِيدَ السُّؤَالَ؟</a:t>
@@ -17002,6 +17139,7 @@
                   <a:srgbClr val="D4AF37"/>
                 </a:solidFill>
                 <a:latin typeface="Amiri" pitchFamily="2" charset="-78"/>
+                <a:ea typeface="Amiri" pitchFamily="2" charset="-78"/>
                 <a:cs typeface="Amiri" pitchFamily="2" charset="-78"/>
               </a:rPr>
               <a:t>م</a:t>
@@ -17322,6 +17460,7 @@
                   <a:srgbClr val="8A6D1E"/>
                 </a:solidFill>
                 <a:latin typeface="Amiri" pitchFamily="2" charset="-78"/>
+                <a:ea typeface="Amiri" pitchFamily="2" charset="-78"/>
                 <a:cs typeface="Amiri" pitchFamily="2" charset="-78"/>
               </a:rPr>
               <a:t>السَّفَرُ وَالمُوَاصَلَاتُ</a:t>
@@ -17602,6 +17741,7 @@
                   <a:srgbClr val="1B3B6F"/>
                 </a:solidFill>
                 <a:latin typeface="Amiri" pitchFamily="2" charset="-78"/>
+                <a:ea typeface="Amiri" pitchFamily="2" charset="-78"/>
                 <a:cs typeface="Amiri" pitchFamily="2" charset="-78"/>
               </a:rPr>
               <a:t>الحَافِلَةُ أَرْخَصُ مِنْ … لٰكِنَّ السَّيَّارَةَ …</a:t>
@@ -17678,6 +17818,7 @@
                   <a:srgbClr val="1B3B6F"/>
                 </a:solidFill>
                 <a:latin typeface="Amiri" pitchFamily="2" charset="-78"/>
+                <a:ea typeface="Amiri" pitchFamily="2" charset="-78"/>
                 <a:cs typeface="Amiri" pitchFamily="2" charset="-78"/>
               </a:rPr>
               <a:t>قَارِنْ بَيْنَ الحَافِلَةِ وَالسَّيَّارَةِ.</a:t>
@@ -17781,6 +17922,7 @@
                   <a:srgbClr val="1B3B6F"/>
                 </a:solidFill>
                 <a:latin typeface="Amiri" pitchFamily="2" charset="-78"/>
+                <a:ea typeface="Amiri" pitchFamily="2" charset="-78"/>
                 <a:cs typeface="Amiri" pitchFamily="2" charset="-78"/>
               </a:rPr>
               <a:t>فِي … سَافَرْتُ إِلَى … وَاسْتَغْرَقَتِ الرِّحْلَةُ …</a:t>
@@ -17857,6 +17999,7 @@
                   <a:srgbClr val="1B3B6F"/>
                 </a:solidFill>
                 <a:latin typeface="Amiri" pitchFamily="2" charset="-78"/>
+                <a:ea typeface="Amiri" pitchFamily="2" charset="-78"/>
                 <a:cs typeface="Amiri" pitchFamily="2" charset="-78"/>
               </a:rPr>
               <a:t>صِفْ رِحْلَةً قُمْتَ بِهَا بِالقِطَارِ أَوِ الطَّائِرَةِ.</a:t>
@@ -17960,6 +18103,7 @@
                   <a:srgbClr val="1B3B6F"/>
                 </a:solidFill>
                 <a:latin typeface="Amiri" pitchFamily="2" charset="-78"/>
+                <a:ea typeface="Amiri" pitchFamily="2" charset="-78"/>
                 <a:cs typeface="Amiri" pitchFamily="2" charset="-78"/>
               </a:rPr>
               <a:t>المُشْكِلَةُ الكُبْرَى هِيَ … خُصُوصًا …</a:t>
@@ -18036,6 +18180,7 @@
                   <a:srgbClr val="1B3B6F"/>
                 </a:solidFill>
                 <a:latin typeface="Amiri" pitchFamily="2" charset="-78"/>
+                <a:ea typeface="Amiri" pitchFamily="2" charset="-78"/>
                 <a:cs typeface="Amiri" pitchFamily="2" charset="-78"/>
               </a:rPr>
               <a:t>مَا المُشْكِلَاتُ فِي المُوَاصَلَاتِ فِي مَدِينَتِكَ؟</a:t>
@@ -18139,6 +18284,7 @@
                   <a:srgbClr val="1B3B6F"/>
                 </a:solidFill>
                 <a:latin typeface="Amiri" pitchFamily="2" charset="-78"/>
+                <a:ea typeface="Amiri" pitchFamily="2" charset="-78"/>
                 <a:cs typeface="Amiri" pitchFamily="2" charset="-78"/>
               </a:rPr>
               <a:t>أَخْرُجُ مِنَ البَيْتِ، ثُمَّ … وَأَنْعَطِفُ …</a:t>
@@ -18215,6 +18361,7 @@
                   <a:srgbClr val="1B3B6F"/>
                 </a:solidFill>
                 <a:latin typeface="Amiri" pitchFamily="2" charset="-78"/>
+                <a:ea typeface="Amiri" pitchFamily="2" charset="-78"/>
                 <a:cs typeface="Amiri" pitchFamily="2" charset="-78"/>
               </a:rPr>
               <a:t>كَيْفَ تَصِفُ الطَّرِيقَ مِنْ بَيْتِكَ إِلَى المَدْرَسَةِ؟</a:t>
@@ -18318,6 +18465,7 @@
                   <a:srgbClr val="1B3B6F"/>
                 </a:solidFill>
                 <a:latin typeface="Amiri" pitchFamily="2" charset="-78"/>
+                <a:ea typeface="Amiri" pitchFamily="2" charset="-78"/>
                 <a:cs typeface="Amiri" pitchFamily="2" charset="-78"/>
               </a:rPr>
               <a:t>نَعَمْ / لَا، سَأَسْتَعْمِلُ … لِأَنَّ …</a:t>
@@ -18394,6 +18542,7 @@
                   <a:srgbClr val="1B3B6F"/>
                 </a:solidFill>
                 <a:latin typeface="Amiri" pitchFamily="2" charset="-78"/>
+                <a:ea typeface="Amiri" pitchFamily="2" charset="-78"/>
                 <a:cs typeface="Amiri" pitchFamily="2" charset="-78"/>
               </a:rPr>
               <a:t>هَلْ سَتَشْتَرِي سَيَّارَةً فِي المُسْتَقْبَلِ؟</a:t>
@@ -18603,6 +18752,7 @@
                   <a:srgbClr val="D4AF37"/>
                 </a:solidFill>
                 <a:latin typeface="Amiri" pitchFamily="2" charset="-78"/>
+                <a:ea typeface="Amiri" pitchFamily="2" charset="-78"/>
                 <a:cs typeface="Amiri" pitchFamily="2" charset="-78"/>
               </a:rPr>
               <a:t>م</a:t>
@@ -18923,6 +19073,7 @@
                   <a:srgbClr val="8A6D1E"/>
                 </a:solidFill>
                 <a:latin typeface="Amiri" pitchFamily="2" charset="-78"/>
+                <a:ea typeface="Amiri" pitchFamily="2" charset="-78"/>
                 <a:cs typeface="Amiri" pitchFamily="2" charset="-78"/>
               </a:rPr>
               <a:t>المُوَاصَلَاتُ وَالبِيئَةُ</a:t>
@@ -19203,6 +19354,7 @@
                   <a:srgbClr val="1B3B6F"/>
                 </a:solidFill>
                 <a:latin typeface="Amiri" pitchFamily="2" charset="-78"/>
+                <a:ea typeface="Amiri" pitchFamily="2" charset="-78"/>
                 <a:cs typeface="Amiri" pitchFamily="2" charset="-78"/>
               </a:rPr>
               <a:t>أَعْتَقِدُ أَنَّ … أَفْضَلُ، لِأَنَّ …</a:t>
@@ -19279,6 +19431,7 @@
                   <a:srgbClr val="1B3B6F"/>
                 </a:solidFill>
                 <a:latin typeface="Amiri" pitchFamily="2" charset="-78"/>
+                <a:ea typeface="Amiri" pitchFamily="2" charset="-78"/>
                 <a:cs typeface="Amiri" pitchFamily="2" charset="-78"/>
               </a:rPr>
               <a:t>هَلِ المُوَاصَلَاتُ العَامَّةُ أَفْضَلُ مِنَ السَّيَّارَاتِ الخَاصَّةِ؟</a:t>
@@ -19382,6 +19535,7 @@
                   <a:srgbClr val="1B3B6F"/>
                 </a:solidFill>
                 <a:latin typeface="Amiri" pitchFamily="2" charset="-78"/>
+                <a:ea typeface="Amiri" pitchFamily="2" charset="-78"/>
                 <a:cs typeface="Amiri" pitchFamily="2" charset="-78"/>
               </a:rPr>
               <a:t>كَانَ جَدِّي يُسَافِرُ … أَمَّا اليَوْمَ فَنَقْطَعُ …</a:t>
@@ -19458,6 +19612,7 @@
                   <a:srgbClr val="1B3B6F"/>
                 </a:solidFill>
                 <a:latin typeface="Amiri" pitchFamily="2" charset="-78"/>
+                <a:ea typeface="Amiri" pitchFamily="2" charset="-78"/>
                 <a:cs typeface="Amiri" pitchFamily="2" charset="-78"/>
               </a:rPr>
               <a:t>كَيْفَ كَانَ النَّاسُ يُسَافِرُونَ فِي أَيَّامِ أَجْدَادِكَ؟</a:t>
@@ -19561,6 +19716,7 @@
                   <a:srgbClr val="1B3B6F"/>
                 </a:solidFill>
                 <a:latin typeface="Amiri" pitchFamily="2" charset="-78"/>
+                <a:ea typeface="Amiri" pitchFamily="2" charset="-78"/>
                 <a:cs typeface="Amiri" pitchFamily="2" charset="-78"/>
               </a:rPr>
               <a:t>صَحِيحٌ أَنَّ … غَيْرَ أَنَّ …</a:t>
@@ -19637,6 +19793,7 @@
                   <a:srgbClr val="1B3B6F"/>
                 </a:solidFill>
                 <a:latin typeface="Amiri" pitchFamily="2" charset="-78"/>
+                <a:ea typeface="Amiri" pitchFamily="2" charset="-78"/>
                 <a:cs typeface="Amiri" pitchFamily="2" charset="-78"/>
               </a:rPr>
               <a:t>هَلْ يَجِبُ أَنْ نَمْنَعَ السَّيَّارَاتِ فِي وَسَطِ المُدُنِ؟</a:t>
@@ -19740,6 +19897,7 @@
                   <a:srgbClr val="1B3B6F"/>
                 </a:solidFill>
                 <a:latin typeface="Amiri" pitchFamily="2" charset="-78"/>
+                <a:ea typeface="Amiri" pitchFamily="2" charset="-78"/>
                 <a:cs typeface="Amiri" pitchFamily="2" charset="-78"/>
               </a:rPr>
               <a:t>أَصْعَبُ رِحْلَةٍ كَانَتْ … عِنْدَمَا …</a:t>
@@ -19816,6 +19974,7 @@
                   <a:srgbClr val="1B3B6F"/>
                 </a:solidFill>
                 <a:latin typeface="Amiri" pitchFamily="2" charset="-78"/>
+                <a:ea typeface="Amiri" pitchFamily="2" charset="-78"/>
                 <a:cs typeface="Amiri" pitchFamily="2" charset="-78"/>
               </a:rPr>
               <a:t>مَا أَصْعَبُ رِحْلَةٍ قُمْتَ بِهَا؟</a:t>
@@ -19919,6 +20078,7 @@
                   <a:srgbClr val="1B3B6F"/>
                 </a:solidFill>
                 <a:latin typeface="Amiri" pitchFamily="2" charset="-78"/>
+                <a:ea typeface="Amiri" pitchFamily="2" charset="-78"/>
                 <a:cs typeface="Amiri" pitchFamily="2" charset="-78"/>
               </a:rPr>
               <a:t>لَوْ صَمَّمْتُ …، لَجَعَلْتُهَا …</a:t>
@@ -19995,6 +20155,7 @@
                   <a:srgbClr val="1B3B6F"/>
                 </a:solidFill>
                 <a:latin typeface="Amiri" pitchFamily="2" charset="-78"/>
+                <a:ea typeface="Amiri" pitchFamily="2" charset="-78"/>
                 <a:cs typeface="Amiri" pitchFamily="2" charset="-78"/>
               </a:rPr>
               <a:t>لَوْ صَمَّمْتَ وَسِيلَةَ مُوَاصَلَاتٍ جَدِيدَةً، كَيْفَ تَكُونُ؟</a:t>
@@ -20204,6 +20365,7 @@
                   <a:srgbClr val="D4AF37"/>
                 </a:solidFill>
                 <a:latin typeface="Amiri" pitchFamily="2" charset="-78"/>
+                <a:ea typeface="Amiri" pitchFamily="2" charset="-78"/>
                 <a:cs typeface="Amiri" pitchFamily="2" charset="-78"/>
               </a:rPr>
               <a:t>م</a:t>
@@ -20524,6 +20686,7 @@
                   <a:srgbClr val="8A6D1E"/>
                 </a:solidFill>
                 <a:latin typeface="Amiri" pitchFamily="2" charset="-78"/>
+                <a:ea typeface="Amiri" pitchFamily="2" charset="-78"/>
                 <a:cs typeface="Amiri" pitchFamily="2" charset="-78"/>
               </a:rPr>
               <a:t>آدَابُ الصَّفِّ</a:t>
@@ -22055,6 +22218,7 @@
                   <a:srgbClr val="D4AF37"/>
                 </a:solidFill>
                 <a:latin typeface="Amiri" pitchFamily="2" charset="-78"/>
+                <a:ea typeface="Amiri" pitchFamily="2" charset="-78"/>
                 <a:cs typeface="Amiri" pitchFamily="2" charset="-78"/>
               </a:rPr>
               <a:t>م</a:t>
@@ -22375,6 +22539,7 @@
                   <a:srgbClr val="8A6D1E"/>
                 </a:solidFill>
                 <a:latin typeface="Amiri" pitchFamily="2" charset="-78"/>
+                <a:ea typeface="Amiri" pitchFamily="2" charset="-78"/>
                 <a:cs typeface="Amiri" pitchFamily="2" charset="-78"/>
               </a:rPr>
               <a:t>نَمُوذَجُ الإِجَابَةِ</a:t>
@@ -22617,6 +22782,7 @@
                   <a:srgbClr val="1B3B6F"/>
                 </a:solidFill>
                 <a:latin typeface="Amiri" pitchFamily="2" charset="-78"/>
+                <a:ea typeface="Amiri" pitchFamily="2" charset="-78"/>
                 <a:cs typeface="Amiri" pitchFamily="2" charset="-78"/>
               </a:rPr>
               <a:t>أَمْشِي إِلَى المَدْرَسَةِ، لِأَنَّهَا قَرِيبَةٌ مِنْ بَيْتِي.</a:t>
@@ -22693,6 +22859,7 @@
                   <a:srgbClr val="1B3B6F"/>
                 </a:solidFill>
                 <a:latin typeface="Amiri" pitchFamily="2" charset="-78"/>
+                <a:ea typeface="Amiri" pitchFamily="2" charset="-78"/>
                 <a:cs typeface="Amiri" pitchFamily="2" charset="-78"/>
               </a:rPr>
               <a:t>كَيْفَ تَذْهَبُ إِلَى المَدْرَسَةِ؟</a:t>
@@ -22796,6 +22963,7 @@
                   <a:srgbClr val="1B3B6F"/>
                 </a:solidFill>
                 <a:latin typeface="Amiri" pitchFamily="2" charset="-78"/>
+                <a:ea typeface="Amiri" pitchFamily="2" charset="-78"/>
                 <a:cs typeface="Amiri" pitchFamily="2" charset="-78"/>
               </a:rPr>
               <a:t>تَسْتَغْرِقُ الرِّحْلَةُ رُبْعَ سَاعَةٍ فَقَطْ.</a:t>
@@ -22872,6 +23040,7 @@
                   <a:srgbClr val="1B3B6F"/>
                 </a:solidFill>
                 <a:latin typeface="Amiri" pitchFamily="2" charset="-78"/>
+                <a:ea typeface="Amiri" pitchFamily="2" charset="-78"/>
                 <a:cs typeface="Amiri" pitchFamily="2" charset="-78"/>
               </a:rPr>
               <a:t>كَمْ دَقِيقَةً تَسْتَغْرِقُ الرِّحْلَةُ؟</a:t>
@@ -22975,6 +23144,7 @@
                   <a:srgbClr val="1B3B6F"/>
                 </a:solidFill>
                 <a:latin typeface="Amiri" pitchFamily="2" charset="-78"/>
+                <a:ea typeface="Amiri" pitchFamily="2" charset="-78"/>
                 <a:cs typeface="Amiri" pitchFamily="2" charset="-78"/>
               </a:rPr>
               <a:t>أُفَضِّلُ القِطَارَ، لِأَنَّهُ سَرِيعٌ وَمُرِيحٌ.</a:t>
@@ -23051,6 +23221,7 @@
                   <a:srgbClr val="1B3B6F"/>
                 </a:solidFill>
                 <a:latin typeface="Amiri" pitchFamily="2" charset="-78"/>
+                <a:ea typeface="Amiri" pitchFamily="2" charset="-78"/>
                 <a:cs typeface="Amiri" pitchFamily="2" charset="-78"/>
               </a:rPr>
               <a:t>مَا وَسِيلَةُ المُوَاصَلَاتِ المُفَضَّلَةُ عِنْدَكَ؟</a:t>
@@ -23154,6 +23325,7 @@
                   <a:srgbClr val="1B3B6F"/>
                 </a:solidFill>
                 <a:latin typeface="Amiri" pitchFamily="2" charset="-78"/>
+                <a:ea typeface="Amiri" pitchFamily="2" charset="-78"/>
                 <a:cs typeface="Amiri" pitchFamily="2" charset="-78"/>
               </a:rPr>
               <a:t>نَعَمْ، عِنْدِي دَرَّاجَةٌ زَرْقَاءُ، وَأَرْكَبُهَا فِي نِهَايَةِ الأُسْبُوعِ.</a:t>
@@ -23230,6 +23402,7 @@
                   <a:srgbClr val="1B3B6F"/>
                 </a:solidFill>
                 <a:latin typeface="Amiri" pitchFamily="2" charset="-78"/>
+                <a:ea typeface="Amiri" pitchFamily="2" charset="-78"/>
                 <a:cs typeface="Amiri" pitchFamily="2" charset="-78"/>
               </a:rPr>
               <a:t>هَلْ عِنْدَكَ دَرَّاجَةٌ؟</a:t>
@@ -23333,6 +23506,7 @@
                   <a:srgbClr val="1B3B6F"/>
                 </a:solidFill>
                 <a:latin typeface="Amiri" pitchFamily="2" charset="-78"/>
+                <a:ea typeface="Amiri" pitchFamily="2" charset="-78"/>
                 <a:cs typeface="Amiri" pitchFamily="2" charset="-78"/>
               </a:rPr>
               <a:t>يَذْهَبُ أَبِي إِلَى العَمَلِ بِالسَّيَّارَةِ كُلَّ يَوْمٍ.</a:t>
@@ -23409,6 +23583,7 @@
                   <a:srgbClr val="1B3B6F"/>
                 </a:solidFill>
                 <a:latin typeface="Amiri" pitchFamily="2" charset="-78"/>
+                <a:ea typeface="Amiri" pitchFamily="2" charset="-78"/>
                 <a:cs typeface="Amiri" pitchFamily="2" charset="-78"/>
               </a:rPr>
               <a:t>كَيْفَ يَذْهَبُ أَبُوكَ إِلَى العَمَلِ؟</a:t>
@@ -23618,6 +23793,7 @@
                   <a:srgbClr val="D4AF37"/>
                 </a:solidFill>
                 <a:latin typeface="Amiri" pitchFamily="2" charset="-78"/>
+                <a:ea typeface="Amiri" pitchFamily="2" charset="-78"/>
                 <a:cs typeface="Amiri" pitchFamily="2" charset="-78"/>
               </a:rPr>
               <a:t>م</a:t>
@@ -23938,6 +24114,7 @@
                   <a:srgbClr val="8A6D1E"/>
                 </a:solidFill>
                 <a:latin typeface="Amiri" pitchFamily="2" charset="-78"/>
+                <a:ea typeface="Amiri" pitchFamily="2" charset="-78"/>
                 <a:cs typeface="Amiri" pitchFamily="2" charset="-78"/>
               </a:rPr>
               <a:t>نَمُوذَجُ الإِجَابَةِ</a:t>
@@ -24180,6 +24357,7 @@
                   <a:srgbClr val="1B3B6F"/>
                 </a:solidFill>
                 <a:latin typeface="Amiri" pitchFamily="2" charset="-78"/>
+                <a:ea typeface="Amiri" pitchFamily="2" charset="-78"/>
                 <a:cs typeface="Amiri" pitchFamily="2" charset="-78"/>
               </a:rPr>
               <a:t>الحَافِلَةُ أَرْخَصُ مِنَ السَّيَّارَةِ، لٰكِنَّ السَّيَّارَةَ أَسْرَعُ وَأَكْثَرُ رَاحَةً.</a:t>
@@ -24256,6 +24434,7 @@
                   <a:srgbClr val="1B3B6F"/>
                 </a:solidFill>
                 <a:latin typeface="Amiri" pitchFamily="2" charset="-78"/>
+                <a:ea typeface="Amiri" pitchFamily="2" charset="-78"/>
                 <a:cs typeface="Amiri" pitchFamily="2" charset="-78"/>
               </a:rPr>
               <a:t>قَارِنْ بَيْنَ الحَافِلَةِ وَالسَّيَّارَةِ.</a:t>
@@ -24359,6 +24538,7 @@
                   <a:srgbClr val="1B3B6F"/>
                 </a:solidFill>
                 <a:latin typeface="Amiri" pitchFamily="2" charset="-78"/>
+                <a:ea typeface="Amiri" pitchFamily="2" charset="-78"/>
                 <a:cs typeface="Amiri" pitchFamily="2" charset="-78"/>
               </a:rPr>
               <a:t>فِي الصَّيْفِ سَافَرْتُ بِالقِطَارِ إِلَى أَدِنْبَرَةَ، وَاسْتَغْرَقَتِ الرِّحْلَةُ أَرْبَعَ سَاعَاتٍ، وَكَانَتِ المَنَاظِرُ جَمِيلَةً.</a:t>
@@ -24435,6 +24615,7 @@
                   <a:srgbClr val="1B3B6F"/>
                 </a:solidFill>
                 <a:latin typeface="Amiri" pitchFamily="2" charset="-78"/>
+                <a:ea typeface="Amiri" pitchFamily="2" charset="-78"/>
                 <a:cs typeface="Amiri" pitchFamily="2" charset="-78"/>
               </a:rPr>
               <a:t>صِفْ رِحْلَةً قُمْتَ بِهَا بِالقِطَارِ أَوِ الطَّائِرَةِ.</a:t>
@@ -24538,6 +24719,7 @@
                   <a:srgbClr val="1B3B6F"/>
                 </a:solidFill>
                 <a:latin typeface="Amiri" pitchFamily="2" charset="-78"/>
+                <a:ea typeface="Amiri" pitchFamily="2" charset="-78"/>
                 <a:cs typeface="Amiri" pitchFamily="2" charset="-78"/>
               </a:rPr>
               <a:t>المُشْكِلَةُ الكُبْرَى هِيَ الازْدِحَامُ، خُصُوصًا فِي الصَّبَاحِ، فَأَحْيَانًا أَصِلُ مُتَأَخِّرًا.</a:t>
@@ -24614,6 +24796,7 @@
                   <a:srgbClr val="1B3B6F"/>
                 </a:solidFill>
                 <a:latin typeface="Amiri" pitchFamily="2" charset="-78"/>
+                <a:ea typeface="Amiri" pitchFamily="2" charset="-78"/>
                 <a:cs typeface="Amiri" pitchFamily="2" charset="-78"/>
               </a:rPr>
               <a:t>مَا المُشْكِلَاتُ فِي المُوَاصَلَاتِ فِي مَدِينَتِكَ؟</a:t>
@@ -24717,6 +24900,7 @@
                   <a:srgbClr val="1B3B6F"/>
                 </a:solidFill>
                 <a:latin typeface="Amiri" pitchFamily="2" charset="-78"/>
+                <a:ea typeface="Amiri" pitchFamily="2" charset="-78"/>
                 <a:cs typeface="Amiri" pitchFamily="2" charset="-78"/>
               </a:rPr>
               <a:t>أَخْرُجُ مِنَ البَيْتِ، وَأَمْشِي إِلَى الأَمَامِ، ثُمَّ أَنْعَطِفُ يَسَارًا عِنْدَ المَسْجِدِ، وَالمَدْرَسَةُ عَلَى اليَمِينِ.</a:t>
@@ -24793,6 +24977,7 @@
                   <a:srgbClr val="1B3B6F"/>
                 </a:solidFill>
                 <a:latin typeface="Amiri" pitchFamily="2" charset="-78"/>
+                <a:ea typeface="Amiri" pitchFamily="2" charset="-78"/>
                 <a:cs typeface="Amiri" pitchFamily="2" charset="-78"/>
               </a:rPr>
               <a:t>كَيْفَ تَصِفُ الطَّرِيقَ مِنْ بَيْتِكَ إِلَى المَدْرَسَةِ؟</a:t>
@@ -24896,6 +25081,7 @@
                   <a:srgbClr val="1B3B6F"/>
                 </a:solidFill>
                 <a:latin typeface="Amiri" pitchFamily="2" charset="-78"/>
+                <a:ea typeface="Amiri" pitchFamily="2" charset="-78"/>
                 <a:cs typeface="Amiri" pitchFamily="2" charset="-78"/>
               </a:rPr>
               <a:t>لَا أَظُنُّ، سَأَسْتَعْمِلُ القِطَارَ وَالدَّرَّاجَةَ، لِأَنَّهُمَا أَفْضَلُ لِلْبِيئَةِ.</a:t>
@@ -24972,6 +25158,7 @@
                   <a:srgbClr val="1B3B6F"/>
                 </a:solidFill>
                 <a:latin typeface="Amiri" pitchFamily="2" charset="-78"/>
+                <a:ea typeface="Amiri" pitchFamily="2" charset="-78"/>
                 <a:cs typeface="Amiri" pitchFamily="2" charset="-78"/>
               </a:rPr>
               <a:t>هَلْ سَتَشْتَرِي سَيَّارَةً فِي المُسْتَقْبَلِ؟</a:t>
@@ -25181,6 +25368,7 @@
                   <a:srgbClr val="D4AF37"/>
                 </a:solidFill>
                 <a:latin typeface="Amiri" pitchFamily="2" charset="-78"/>
+                <a:ea typeface="Amiri" pitchFamily="2" charset="-78"/>
                 <a:cs typeface="Amiri" pitchFamily="2" charset="-78"/>
               </a:rPr>
               <a:t>م</a:t>
@@ -25501,6 +25689,7 @@
                   <a:srgbClr val="8A6D1E"/>
                 </a:solidFill>
                 <a:latin typeface="Amiri" pitchFamily="2" charset="-78"/>
+                <a:ea typeface="Amiri" pitchFamily="2" charset="-78"/>
                 <a:cs typeface="Amiri" pitchFamily="2" charset="-78"/>
               </a:rPr>
               <a:t>نَمُوذَجُ الإِجَابَةِ</a:t>
@@ -25743,6 +25932,7 @@
                   <a:srgbClr val="1B3B6F"/>
                 </a:solidFill>
                 <a:latin typeface="Amiri" pitchFamily="2" charset="-78"/>
+                <a:ea typeface="Amiri" pitchFamily="2" charset="-78"/>
                 <a:cs typeface="Amiri" pitchFamily="2" charset="-78"/>
               </a:rPr>
               <a:t>أَعْتَقِدُ أَنَّ المُوَاصَلَاتِ العَامَّةَ أَفْضَلُ، لِأَنَّ حَافِلَةً وَاحِدَةً تَنْقُلُ خَمْسِينَ شَخْصًا بَدَلًا مِنْ خَمْسِينَ سَيَّارَةً.</a:t>
@@ -25822,6 +26012,7 @@
                   <a:srgbClr val="1B3B6F"/>
                 </a:solidFill>
                 <a:latin typeface="Amiri" pitchFamily="2" charset="-78"/>
+                <a:ea typeface="Amiri" pitchFamily="2" charset="-78"/>
                 <a:cs typeface="Amiri" pitchFamily="2" charset="-78"/>
               </a:rPr>
               <a:t>هَلِ المُوَاصَلَاتُ العَامَّةُ أَفْضَلُ مِنَ السَّيَّارَاتِ الخَاصَّةِ؟</a:t>
@@ -25925,6 +26116,7 @@
                   <a:srgbClr val="1B3B6F"/>
                 </a:solidFill>
                 <a:latin typeface="Amiri" pitchFamily="2" charset="-78"/>
+                <a:ea typeface="Amiri" pitchFamily="2" charset="-78"/>
                 <a:cs typeface="Amiri" pitchFamily="2" charset="-78"/>
               </a:rPr>
               <a:t>كَانَ جَدِّي يُسَافِرُ بَيْنَ القُرَى عَلَى الحِمَارِ، أَمَّا اليَوْمَ فَنَقْطَعُ المَسَافَةَ نَفْسَهَا بِالسَّيَّارَةِ فِي دَقَائِقَ.</a:t>
@@ -26001,6 +26193,7 @@
                   <a:srgbClr val="1B3B6F"/>
                 </a:solidFill>
                 <a:latin typeface="Amiri" pitchFamily="2" charset="-78"/>
+                <a:ea typeface="Amiri" pitchFamily="2" charset="-78"/>
                 <a:cs typeface="Amiri" pitchFamily="2" charset="-78"/>
               </a:rPr>
               <a:t>كَيْفَ كَانَ النَّاسُ يُسَافِرُونَ فِي أَيَّامِ أَجْدَادِكَ؟</a:t>
@@ -26104,6 +26297,7 @@
                   <a:srgbClr val="1B3B6F"/>
                 </a:solidFill>
                 <a:latin typeface="Amiri" pitchFamily="2" charset="-78"/>
+                <a:ea typeface="Amiri" pitchFamily="2" charset="-78"/>
                 <a:cs typeface="Amiri" pitchFamily="2" charset="-78"/>
               </a:rPr>
               <a:t>صَحِيحٌ أَنَّ المَنْعَ يُقَلِّلُ التَّلَوُّثَ، غَيْرَ أَنَّهُ صَعْبٌ عَلَى كِبَارِ السِّنِّ وَذَوِي الإِعَاقَةِ.</a:t>
@@ -26180,6 +26374,7 @@
                   <a:srgbClr val="1B3B6F"/>
                 </a:solidFill>
                 <a:latin typeface="Amiri" pitchFamily="2" charset="-78"/>
+                <a:ea typeface="Amiri" pitchFamily="2" charset="-78"/>
                 <a:cs typeface="Amiri" pitchFamily="2" charset="-78"/>
               </a:rPr>
               <a:t>هَلْ يَجِبُ أَنْ نَمْنَعَ السَّيَّارَاتِ فِي وَسَطِ المُدُنِ؟</a:t>
@@ -26389,6 +26584,7 @@
                   <a:srgbClr val="D4AF37"/>
                 </a:solidFill>
                 <a:latin typeface="Amiri" pitchFamily="2" charset="-78"/>
+                <a:ea typeface="Amiri" pitchFamily="2" charset="-78"/>
                 <a:cs typeface="Amiri" pitchFamily="2" charset="-78"/>
               </a:rPr>
               <a:t>م</a:t>
@@ -26709,6 +26905,7 @@
                   <a:srgbClr val="8A6D1E"/>
                 </a:solidFill>
                 <a:latin typeface="Amiri" pitchFamily="2" charset="-78"/>
+                <a:ea typeface="Amiri" pitchFamily="2" charset="-78"/>
                 <a:cs typeface="Amiri" pitchFamily="2" charset="-78"/>
               </a:rPr>
               <a:t>نَمُوذَجُ الإِجَابَةِ</a:t>
@@ -26951,6 +27148,7 @@
                   <a:srgbClr val="1B3B6F"/>
                 </a:solidFill>
                 <a:latin typeface="Amiri" pitchFamily="2" charset="-78"/>
+                <a:ea typeface="Amiri" pitchFamily="2" charset="-78"/>
                 <a:cs typeface="Amiri" pitchFamily="2" charset="-78"/>
               </a:rPr>
               <a:t>أَصْعَبُ رِحْلَةٍ كَانَتْ عِنْدَمَا تَأَخَّرَ قِطَارُنَا ثَلَاثَ سَاعَاتٍ بِسَبَبِ الثَّلْجِ، فَوَصَلْنَا فِي مُنْتَصَفِ اللَّيْلِ.</a:t>
@@ -27027,6 +27225,7 @@
                   <a:srgbClr val="1B3B6F"/>
                 </a:solidFill>
                 <a:latin typeface="Amiri" pitchFamily="2" charset="-78"/>
+                <a:ea typeface="Amiri" pitchFamily="2" charset="-78"/>
                 <a:cs typeface="Amiri" pitchFamily="2" charset="-78"/>
               </a:rPr>
               <a:t>مَا أَصْعَبُ رِحْلَةٍ قُمْتَ بِهَا؟</a:t>
@@ -27130,6 +27329,7 @@
                   <a:srgbClr val="1B3B6F"/>
                 </a:solidFill>
                 <a:latin typeface="Amiri" pitchFamily="2" charset="-78"/>
+                <a:ea typeface="Amiri" pitchFamily="2" charset="-78"/>
                 <a:cs typeface="Amiri" pitchFamily="2" charset="-78"/>
               </a:rPr>
               <a:t>لَوْ صَمَّمْتُ وَسِيلَةً جَدِيدَةً، لَجَعَلْتُهَا تَطِيرُ بِالطَّاقَةِ الشَّمْسِيَّةِ، فَتَكُونُ سَرِيعَةً وَنَظِيفَةً مَعًا.</a:t>
@@ -27206,6 +27406,7 @@
                   <a:srgbClr val="1B3B6F"/>
                 </a:solidFill>
                 <a:latin typeface="Amiri" pitchFamily="2" charset="-78"/>
+                <a:ea typeface="Amiri" pitchFamily="2" charset="-78"/>
                 <a:cs typeface="Amiri" pitchFamily="2" charset="-78"/>
               </a:rPr>
               <a:t>لَوْ صَمَّمْتَ وَسِيلَةَ مُوَاصَلَاتٍ جَدِيدَةً، كَيْفَ تَكُونُ؟</a:t>
@@ -27415,6 +27616,7 @@
                   <a:srgbClr val="D4AF37"/>
                 </a:solidFill>
                 <a:latin typeface="Amiri" pitchFamily="2" charset="-78"/>
+                <a:ea typeface="Amiri" pitchFamily="2" charset="-78"/>
                 <a:cs typeface="Amiri" pitchFamily="2" charset="-78"/>
               </a:rPr>
               <a:t>م</a:t>
@@ -27735,6 +27937,7 @@
                   <a:srgbClr val="8A6D1E"/>
                 </a:solidFill>
                 <a:latin typeface="Amiri" pitchFamily="2" charset="-78"/>
+                <a:ea typeface="Amiri" pitchFamily="2" charset="-78"/>
                 <a:cs typeface="Amiri" pitchFamily="2" charset="-78"/>
               </a:rPr>
               <a:t>قَيِّمْ عَمَلَكَ</a:t>
@@ -28979,6 +29182,7 @@
                   <a:srgbClr val="FFFFFF"/>
                 </a:solidFill>
                 <a:latin typeface="Amiri" pitchFamily="2" charset="-78"/>
+                <a:ea typeface="Amiri" pitchFamily="2" charset="-78"/>
                 <a:cs typeface="Amiri" pitchFamily="2" charset="-78"/>
               </a:rPr>
               <a:t>أَحْسَنْتُمْ! إِلَى اللِّقَاءِ</a:t>
@@ -29131,6 +29335,7 @@
                   <a:srgbClr val="D4AF37"/>
                 </a:solidFill>
                 <a:latin typeface="Amiri" pitchFamily="2" charset="-78"/>
+                <a:ea typeface="Amiri" pitchFamily="2" charset="-78"/>
                 <a:cs typeface="Amiri" pitchFamily="2" charset="-78"/>
               </a:rPr>
               <a:t>وَرْشَةُ الكِتَابَةِ</a:t>
@@ -29264,6 +29469,7 @@
                   <a:srgbClr val="D4AF37"/>
                 </a:solidFill>
                 <a:latin typeface="Amiri" pitchFamily="2" charset="-78"/>
+                <a:ea typeface="Amiri" pitchFamily="2" charset="-78"/>
                 <a:cs typeface="Amiri" pitchFamily="2" charset="-78"/>
               </a:rPr>
               <a:t>م</a:t>
@@ -29584,6 +29790,7 @@
                   <a:srgbClr val="8A6D1E"/>
                 </a:solidFill>
                 <a:latin typeface="Amiri" pitchFamily="2" charset="-78"/>
+                <a:ea typeface="Amiri" pitchFamily="2" charset="-78"/>
                 <a:cs typeface="Amiri" pitchFamily="2" charset="-78"/>
               </a:rPr>
               <a:t>خَرِيطَةُ الوَرْشَةِ</a:t>
@@ -29898,6 +30105,7 @@
                   <a:srgbClr val="1B3B6F"/>
                 </a:solidFill>
                 <a:latin typeface="Amiri" pitchFamily="2" charset="-78"/>
+                <a:ea typeface="Amiri" pitchFamily="2" charset="-78"/>
                 <a:cs typeface="Amiri" pitchFamily="2" charset="-78"/>
               </a:rPr>
               <a:t>كَيْفَ</a:t>
@@ -30174,6 +30382,7 @@
                   <a:srgbClr val="1E6B52"/>
                 </a:solidFill>
                 <a:latin typeface="Amiri" pitchFamily="2" charset="-78"/>
+                <a:ea typeface="Amiri" pitchFamily="2" charset="-78"/>
                 <a:cs typeface="Amiri" pitchFamily="2" charset="-78"/>
               </a:rPr>
               <a:t>تَمْثِيلُ الدَّوْرِ</a:t>
@@ -30450,6 +30659,7 @@
                   <a:srgbClr val="8A6D1E"/>
                 </a:solidFill>
                 <a:latin typeface="Amiri" pitchFamily="2" charset="-78"/>
+                <a:ea typeface="Amiri" pitchFamily="2" charset="-78"/>
                 <a:cs typeface="Amiri" pitchFamily="2" charset="-78"/>
               </a:rPr>
               <a:t>النَّمُوذَجُ</a:t>
@@ -30726,6 +30936,7 @@
                   <a:srgbClr val="1E6B52"/>
                 </a:solidFill>
                 <a:latin typeface="Amiri" pitchFamily="2" charset="-78"/>
+                <a:ea typeface="Amiri" pitchFamily="2" charset="-78"/>
                 <a:cs typeface="Amiri" pitchFamily="2" charset="-78"/>
               </a:rPr>
               <a:t>المُحَادَثَةُ</a:t>
@@ -31002,6 +31213,7 @@
                   <a:srgbClr val="8A6D1E"/>
                 </a:solidFill>
                 <a:latin typeface="Amiri" pitchFamily="2" charset="-78"/>
+                <a:ea typeface="Amiri" pitchFamily="2" charset="-78"/>
                 <a:cs typeface="Amiri" pitchFamily="2" charset="-78"/>
               </a:rPr>
               <a:t>قَيِّمْ</a:t>
@@ -31245,6 +31457,7 @@
                   <a:srgbClr val="D4AF37"/>
                 </a:solidFill>
                 <a:latin typeface="Amiri" pitchFamily="2" charset="-78"/>
+                <a:ea typeface="Amiri" pitchFamily="2" charset="-78"/>
                 <a:cs typeface="Amiri" pitchFamily="2" charset="-78"/>
               </a:rPr>
               <a:t>م</a:t>
@@ -31565,6 +31778,7 @@
                   <a:srgbClr val="8A6D1E"/>
                 </a:solidFill>
                 <a:latin typeface="Amiri" pitchFamily="2" charset="-78"/>
+                <a:ea typeface="Amiri" pitchFamily="2" charset="-78"/>
                 <a:cs typeface="Amiri" pitchFamily="2" charset="-78"/>
               </a:rPr>
               <a:t>امْتِحَانُ التَّحَدُّثِ</a:t>
@@ -32189,6 +32403,7 @@
                   <a:srgbClr val="1B3B6F"/>
                 </a:solidFill>
                 <a:latin typeface="Amiri" pitchFamily="2" charset="-78"/>
+                <a:ea typeface="Amiri" pitchFamily="2" charset="-78"/>
                 <a:cs typeface="Amiri" pitchFamily="2" charset="-78"/>
               </a:rPr>
               <a:t>عَفْوًا، هَلْ يُمْكِنُ أَنْ تُعِيدَ السُّؤَالَ؟</a:t>
@@ -32288,6 +32503,7 @@
                   <a:srgbClr val="1B3B6F"/>
                 </a:solidFill>
                 <a:latin typeface="Amiri" pitchFamily="2" charset="-78"/>
+                <a:ea typeface="Amiri" pitchFamily="2" charset="-78"/>
                 <a:cs typeface="Amiri" pitchFamily="2" charset="-78"/>
               </a:rPr>
               <a:t>لَحْظَةً، دَعْنِي أُفَكِّرُ …</a:t>
@@ -32387,6 +32603,7 @@
                   <a:srgbClr val="1B3B6F"/>
                 </a:solidFill>
                 <a:latin typeface="Amiri" pitchFamily="2" charset="-78"/>
+                <a:ea typeface="Amiri" pitchFamily="2" charset="-78"/>
                 <a:cs typeface="Amiri" pitchFamily="2" charset="-78"/>
               </a:rPr>
               <a:t>أَقْصِدُ …</a:t>
@@ -32558,6 +32775,7 @@
                   <a:srgbClr val="D4AF37"/>
                 </a:solidFill>
                 <a:latin typeface="Amiri" pitchFamily="2" charset="-78"/>
+                <a:ea typeface="Amiri" pitchFamily="2" charset="-78"/>
                 <a:cs typeface="Amiri" pitchFamily="2" charset="-78"/>
               </a:rPr>
               <a:t>م</a:t>
@@ -32878,6 +33096,7 @@
                   <a:srgbClr val="8A6D1E"/>
                 </a:solidFill>
                 <a:latin typeface="Amiri" pitchFamily="2" charset="-78"/>
+                <a:ea typeface="Amiri" pitchFamily="2" charset="-78"/>
                 <a:cs typeface="Amiri" pitchFamily="2" charset="-78"/>
               </a:rPr>
               <a:t>كَيْفَ تَذْهَبُ؟</a:t>
@@ -33181,6 +33400,7 @@
                   <a:srgbClr val="1B3B6F"/>
                 </a:solidFill>
                 <a:latin typeface="Amiri" pitchFamily="2" charset="-78"/>
+                <a:ea typeface="Amiri" pitchFamily="2" charset="-78"/>
                 <a:cs typeface="Amiri" pitchFamily="2" charset="-78"/>
               </a:rPr>
               <a:t>أَذْهَبُ بِالحَافِلَةِ</a:t>
@@ -33338,6 +33558,7 @@
                   <a:srgbClr val="1B3B6F"/>
                 </a:solidFill>
                 <a:latin typeface="Amiri" pitchFamily="2" charset="-78"/>
+                <a:ea typeface="Amiri" pitchFamily="2" charset="-78"/>
                 <a:cs typeface="Amiri" pitchFamily="2" charset="-78"/>
               </a:rPr>
               <a:t>يَذْهَبُونَ</a:t>
@@ -33441,6 +33662,7 @@
                   <a:srgbClr val="1B3B6F"/>
                 </a:solidFill>
                 <a:latin typeface="Amiri" pitchFamily="2" charset="-78"/>
+                <a:ea typeface="Amiri" pitchFamily="2" charset="-78"/>
                 <a:cs typeface="Amiri" pitchFamily="2" charset="-78"/>
               </a:rPr>
               <a:t>تَذْهَبُ</a:t>
@@ -33544,6 +33766,7 @@
                   <a:srgbClr val="1B3B6F"/>
                 </a:solidFill>
                 <a:latin typeface="Amiri" pitchFamily="2" charset="-78"/>
+                <a:ea typeface="Amiri" pitchFamily="2" charset="-78"/>
                 <a:cs typeface="Amiri" pitchFamily="2" charset="-78"/>
               </a:rPr>
               <a:t>يَذْهَبُ</a:t>
@@ -33809,6 +34032,7 @@
                   <a:srgbClr val="1B3B6F"/>
                 </a:solidFill>
                 <a:latin typeface="Amiri" pitchFamily="2" charset="-78"/>
+                <a:ea typeface="Amiri" pitchFamily="2" charset="-78"/>
                 <a:cs typeface="Amiri" pitchFamily="2" charset="-78"/>
               </a:rPr>
               <a:t>أَرْكَبُ</a:t>
@@ -33966,6 +34190,7 @@
                   <a:srgbClr val="1B3B6F"/>
                 </a:solidFill>
                 <a:latin typeface="Amiri" pitchFamily="2" charset="-78"/>
+                <a:ea typeface="Amiri" pitchFamily="2" charset="-78"/>
                 <a:cs typeface="Amiri" pitchFamily="2" charset="-78"/>
               </a:rPr>
               <a:t>يَرْكَبُونَ</a:t>
@@ -34069,6 +34294,7 @@
                   <a:srgbClr val="1B3B6F"/>
                 </a:solidFill>
                 <a:latin typeface="Amiri" pitchFamily="2" charset="-78"/>
+                <a:ea typeface="Amiri" pitchFamily="2" charset="-78"/>
                 <a:cs typeface="Amiri" pitchFamily="2" charset="-78"/>
               </a:rPr>
               <a:t>تَرْكَبُ</a:t>
@@ -34172,6 +34398,7 @@
                   <a:srgbClr val="1B3B6F"/>
                 </a:solidFill>
                 <a:latin typeface="Amiri" pitchFamily="2" charset="-78"/>
+                <a:ea typeface="Amiri" pitchFamily="2" charset="-78"/>
                 <a:cs typeface="Amiri" pitchFamily="2" charset="-78"/>
               </a:rPr>
               <a:t>يَرْكَبُ</a:t>
@@ -34437,6 +34664,7 @@
                   <a:srgbClr val="1B3B6F"/>
                 </a:solidFill>
                 <a:latin typeface="Amiri" pitchFamily="2" charset="-78"/>
+                <a:ea typeface="Amiri" pitchFamily="2" charset="-78"/>
                 <a:cs typeface="Amiri" pitchFamily="2" charset="-78"/>
               </a:rPr>
               <a:t>أَصِلُ</a:t>
@@ -34594,6 +34822,7 @@
                   <a:srgbClr val="1B3B6F"/>
                 </a:solidFill>
                 <a:latin typeface="Amiri" pitchFamily="2" charset="-78"/>
+                <a:ea typeface="Amiri" pitchFamily="2" charset="-78"/>
                 <a:cs typeface="Amiri" pitchFamily="2" charset="-78"/>
               </a:rPr>
               <a:t>يَصِلُونَ</a:t>
@@ -34697,6 +34926,7 @@
                   <a:srgbClr val="1B3B6F"/>
                 </a:solidFill>
                 <a:latin typeface="Amiri" pitchFamily="2" charset="-78"/>
+                <a:ea typeface="Amiri" pitchFamily="2" charset="-78"/>
                 <a:cs typeface="Amiri" pitchFamily="2" charset="-78"/>
               </a:rPr>
               <a:t>تَصِلُ</a:t>
@@ -34800,6 +35030,7 @@
                   <a:srgbClr val="1B3B6F"/>
                 </a:solidFill>
                 <a:latin typeface="Amiri" pitchFamily="2" charset="-78"/>
+                <a:ea typeface="Amiri" pitchFamily="2" charset="-78"/>
                 <a:cs typeface="Amiri" pitchFamily="2" charset="-78"/>
               </a:rPr>
               <a:t>يَصِلُ</a:t>
@@ -35065,6 +35296,7 @@
                   <a:srgbClr val="1B3B6F"/>
                 </a:solidFill>
                 <a:latin typeface="Amiri" pitchFamily="2" charset="-78"/>
+                <a:ea typeface="Amiri" pitchFamily="2" charset="-78"/>
                 <a:cs typeface="Amiri" pitchFamily="2" charset="-78"/>
               </a:rPr>
               <a:t>أَمْشِي</a:t>
@@ -35222,6 +35454,7 @@
                   <a:srgbClr val="1B3B6F"/>
                 </a:solidFill>
                 <a:latin typeface="Amiri" pitchFamily="2" charset="-78"/>
+                <a:ea typeface="Amiri" pitchFamily="2" charset="-78"/>
                 <a:cs typeface="Amiri" pitchFamily="2" charset="-78"/>
               </a:rPr>
               <a:t>يَمْشُونَ</a:t>
@@ -35325,6 +35558,7 @@
                   <a:srgbClr val="1B3B6F"/>
                 </a:solidFill>
                 <a:latin typeface="Amiri" pitchFamily="2" charset="-78"/>
+                <a:ea typeface="Amiri" pitchFamily="2" charset="-78"/>
                 <a:cs typeface="Amiri" pitchFamily="2" charset="-78"/>
               </a:rPr>
               <a:t>تَمْشِي</a:t>
@@ -35428,6 +35662,7 @@
                   <a:srgbClr val="1B3B6F"/>
                 </a:solidFill>
                 <a:latin typeface="Amiri" pitchFamily="2" charset="-78"/>
+                <a:ea typeface="Amiri" pitchFamily="2" charset="-78"/>
                 <a:cs typeface="Amiri" pitchFamily="2" charset="-78"/>
               </a:rPr>
               <a:t>يَمْشِي</a:t>
@@ -35693,6 +35928,7 @@
                   <a:srgbClr val="1B3B6F"/>
                 </a:solidFill>
                 <a:latin typeface="Amiri" pitchFamily="2" charset="-78"/>
+                <a:ea typeface="Amiri" pitchFamily="2" charset="-78"/>
                 <a:cs typeface="Amiri" pitchFamily="2" charset="-78"/>
               </a:rPr>
               <a:t>حَافِلَةٌ · قِطَارٌ · سَيَّارَةٌ</a:t>
@@ -35850,6 +36086,7 @@
                   <a:srgbClr val="1B3B6F"/>
                 </a:solidFill>
                 <a:latin typeface="Amiri" pitchFamily="2" charset="-78"/>
+                <a:ea typeface="Amiri" pitchFamily="2" charset="-78"/>
                 <a:cs typeface="Amiri" pitchFamily="2" charset="-78"/>
               </a:rPr>
               <a:t>حَافِلَاتٌ · قِطَارَاتٌ · سَيَّارَاتٌ</a:t>
@@ -36115,6 +36352,7 @@
                   <a:srgbClr val="1B3B6F"/>
                 </a:solidFill>
                 <a:latin typeface="Amiri" pitchFamily="2" charset="-78"/>
+                <a:ea typeface="Amiri" pitchFamily="2" charset="-78"/>
                 <a:cs typeface="Amiri" pitchFamily="2" charset="-78"/>
               </a:rPr>
               <a:t>مَحَطَّةٌ</a:t>
@@ -36272,6 +36510,7 @@
                   <a:srgbClr val="1B3B6F"/>
                 </a:solidFill>
                 <a:latin typeface="Amiri" pitchFamily="2" charset="-78"/>
+                <a:ea typeface="Amiri" pitchFamily="2" charset="-78"/>
                 <a:cs typeface="Amiri" pitchFamily="2" charset="-78"/>
               </a:rPr>
               <a:t>مَحَطَّاتٌ</a:t>
@@ -36375,6 +36614,7 @@
                   <a:srgbClr val="1B3B6F"/>
                 </a:solidFill>
                 <a:latin typeface="Amiri" pitchFamily="2" charset="-78"/>
+                <a:ea typeface="Amiri" pitchFamily="2" charset="-78"/>
                 <a:cs typeface="Amiri" pitchFamily="2" charset="-78"/>
               </a:rPr>
               <a:t>مَحَطَّةٌ</a:t>
@@ -36508,6 +36748,7 @@
                   <a:srgbClr val="D4AF37"/>
                 </a:solidFill>
                 <a:latin typeface="Amiri" pitchFamily="2" charset="-78"/>
+                <a:ea typeface="Amiri" pitchFamily="2" charset="-78"/>
                 <a:cs typeface="Amiri" pitchFamily="2" charset="-78"/>
               </a:rPr>
               <a:t>م</a:t>
@@ -36828,6 +37069,7 @@
                   <a:srgbClr val="8A6D1E"/>
                 </a:solidFill>
                 <a:latin typeface="Amiri" pitchFamily="2" charset="-78"/>
+                <a:ea typeface="Amiri" pitchFamily="2" charset="-78"/>
                 <a:cs typeface="Amiri" pitchFamily="2" charset="-78"/>
               </a:rPr>
               <a:t>المُقَارَنَةُ وَالاتِّجَاهَاتُ</a:t>
@@ -37131,6 +37373,7 @@
                   <a:srgbClr val="1B3B6F"/>
                 </a:solidFill>
                 <a:latin typeface="Amiri" pitchFamily="2" charset="-78"/>
+                <a:ea typeface="Amiri" pitchFamily="2" charset="-78"/>
                 <a:cs typeface="Amiri" pitchFamily="2" charset="-78"/>
               </a:rPr>
               <a:t>تَذْكِرَةٌ</a:t>
@@ -37288,6 +37531,7 @@
                   <a:srgbClr val="1B3B6F"/>
                 </a:solidFill>
                 <a:latin typeface="Amiri" pitchFamily="2" charset="-78"/>
+                <a:ea typeface="Amiri" pitchFamily="2" charset="-78"/>
                 <a:cs typeface="Amiri" pitchFamily="2" charset="-78"/>
               </a:rPr>
               <a:t>تَذَاكِرُ</a:t>
@@ -37391,6 +37635,7 @@
                   <a:srgbClr val="1B3B6F"/>
                 </a:solidFill>
                 <a:latin typeface="Amiri" pitchFamily="2" charset="-78"/>
+                <a:ea typeface="Amiri" pitchFamily="2" charset="-78"/>
                 <a:cs typeface="Amiri" pitchFamily="2" charset="-78"/>
               </a:rPr>
               <a:t>تَذْكِرَةٌ</a:t>
@@ -37656,6 +37901,7 @@
                   <a:srgbClr val="1B3B6F"/>
                 </a:solidFill>
                 <a:latin typeface="Amiri" pitchFamily="2" charset="-78"/>
+                <a:ea typeface="Amiri" pitchFamily="2" charset="-78"/>
                 <a:cs typeface="Amiri" pitchFamily="2" charset="-78"/>
               </a:rPr>
               <a:t>سَرِيعٌ</a:t>
@@ -37813,6 +38059,7 @@
                   <a:srgbClr val="1B3B6F"/>
                 </a:solidFill>
                 <a:latin typeface="Amiri" pitchFamily="2" charset="-78"/>
+                <a:ea typeface="Amiri" pitchFamily="2" charset="-78"/>
                 <a:cs typeface="Amiri" pitchFamily="2" charset="-78"/>
               </a:rPr>
               <a:t>أَسْرَعُ مِنْ</a:t>
@@ -37916,6 +38163,7 @@
                   <a:srgbClr val="1B3B6F"/>
                 </a:solidFill>
                 <a:latin typeface="Amiri" pitchFamily="2" charset="-78"/>
+                <a:ea typeface="Amiri" pitchFamily="2" charset="-78"/>
                 <a:cs typeface="Amiri" pitchFamily="2" charset="-78"/>
               </a:rPr>
               <a:t>سَرِيعَةٌ</a:t>
@@ -38019,6 +38267,7 @@
                   <a:srgbClr val="1B3B6F"/>
                 </a:solidFill>
                 <a:latin typeface="Amiri" pitchFamily="2" charset="-78"/>
+                <a:ea typeface="Amiri" pitchFamily="2" charset="-78"/>
                 <a:cs typeface="Amiri" pitchFamily="2" charset="-78"/>
               </a:rPr>
               <a:t>سَرِيعٌ</a:t>
@@ -38284,6 +38533,7 @@
                   <a:srgbClr val="1B3B6F"/>
                 </a:solidFill>
                 <a:latin typeface="Amiri" pitchFamily="2" charset="-78"/>
+                <a:ea typeface="Amiri" pitchFamily="2" charset="-78"/>
                 <a:cs typeface="Amiri" pitchFamily="2" charset="-78"/>
               </a:rPr>
               <a:t>رَخِيصٌ · غَالٍ</a:t>
@@ -38441,6 +38691,7 @@
                   <a:srgbClr val="1B3B6F"/>
                 </a:solidFill>
                 <a:latin typeface="Amiri" pitchFamily="2" charset="-78"/>
+                <a:ea typeface="Amiri" pitchFamily="2" charset="-78"/>
                 <a:cs typeface="Amiri" pitchFamily="2" charset="-78"/>
               </a:rPr>
               <a:t>أَغْلَى</a:t>
@@ -38544,6 +38795,7 @@
                   <a:srgbClr val="1B3B6F"/>
                 </a:solidFill>
                 <a:latin typeface="Amiri" pitchFamily="2" charset="-78"/>
+                <a:ea typeface="Amiri" pitchFamily="2" charset="-78"/>
                 <a:cs typeface="Amiri" pitchFamily="2" charset="-78"/>
               </a:rPr>
               <a:t>أَرْخَصُ</a:t>
@@ -38809,6 +39061,7 @@
                   <a:srgbClr val="1B3B6F"/>
                 </a:solidFill>
                 <a:latin typeface="Amiri" pitchFamily="2" charset="-78"/>
+                <a:ea typeface="Amiri" pitchFamily="2" charset="-78"/>
                 <a:cs typeface="Amiri" pitchFamily="2" charset="-78"/>
               </a:rPr>
               <a:t>مُزْدَحِمٌ</a:t>
@@ -38966,6 +39219,7 @@
                   <a:srgbClr val="1B3B6F"/>
                 </a:solidFill>
                 <a:latin typeface="Amiri" pitchFamily="2" charset="-78"/>
+                <a:ea typeface="Amiri" pitchFamily="2" charset="-78"/>
                 <a:cs typeface="Amiri" pitchFamily="2" charset="-78"/>
               </a:rPr>
               <a:t>أَكْثَرُ ازْدِحَامًا</a:t>
@@ -39069,6 +39323,7 @@
                   <a:srgbClr val="1B3B6F"/>
                 </a:solidFill>
                 <a:latin typeface="Amiri" pitchFamily="2" charset="-78"/>
+                <a:ea typeface="Amiri" pitchFamily="2" charset="-78"/>
                 <a:cs typeface="Amiri" pitchFamily="2" charset="-78"/>
               </a:rPr>
               <a:t>مُزْدَحِمَةٌ</a:t>
@@ -39172,6 +39427,7 @@
                   <a:srgbClr val="1B3B6F"/>
                 </a:solidFill>
                 <a:latin typeface="Amiri" pitchFamily="2" charset="-78"/>
+                <a:ea typeface="Amiri" pitchFamily="2" charset="-78"/>
                 <a:cs typeface="Amiri" pitchFamily="2" charset="-78"/>
               </a:rPr>
               <a:t>مُزْدَحِمٌ</a:t>
@@ -39437,6 +39693,7 @@
                   <a:srgbClr val="1B3B6F"/>
                 </a:solidFill>
                 <a:latin typeface="Amiri" pitchFamily="2" charset="-78"/>
+                <a:ea typeface="Amiri" pitchFamily="2" charset="-78"/>
                 <a:cs typeface="Amiri" pitchFamily="2" charset="-78"/>
               </a:rPr>
               <a:t>اذْهَبْ · خُذْ · انْعَطِفْ</a:t>
@@ -39594,6 +39851,7 @@
                   <a:srgbClr val="1B3B6F"/>
                 </a:solidFill>
                 <a:latin typeface="Amiri" pitchFamily="2" charset="-78"/>
+                <a:ea typeface="Amiri" pitchFamily="2" charset="-78"/>
                 <a:cs typeface="Amiri" pitchFamily="2" charset="-78"/>
               </a:rPr>
               <a:t>اذْهَبِي · خُذِي · انْعَطِفِي</a:t>
@@ -39859,6 +40117,7 @@
                   <a:srgbClr val="1B3B6F"/>
                 </a:solidFill>
                 <a:latin typeface="Amiri" pitchFamily="2" charset="-78"/>
+                <a:ea typeface="Amiri" pitchFamily="2" charset="-78"/>
                 <a:cs typeface="Amiri" pitchFamily="2" charset="-78"/>
               </a:rPr>
               <a:t>يَمِينًا · يَسَارًا · إِلَى الأَمَامِ</a:t>
@@ -40046,6 +40305,7 @@
                   <a:srgbClr val="D4AF37"/>
                 </a:solidFill>
                 <a:latin typeface="Amiri" pitchFamily="2" charset="-78"/>
+                <a:ea typeface="Amiri" pitchFamily="2" charset="-78"/>
                 <a:cs typeface="Amiri" pitchFamily="2" charset="-78"/>
               </a:rPr>
               <a:t>م</a:t>
@@ -40366,6 +40626,7 @@
                   <a:srgbClr val="8A6D1E"/>
                 </a:solidFill>
                 <a:latin typeface="Amiri" pitchFamily="2" charset="-78"/>
+                <a:ea typeface="Amiri" pitchFamily="2" charset="-78"/>
                 <a:cs typeface="Amiri" pitchFamily="2" charset="-78"/>
               </a:rPr>
               <a:t>فِي الغُرَفِ</a:t>
@@ -41542,6 +41803,7 @@
                   <a:srgbClr val="1B3B6F"/>
                 </a:solidFill>
                 <a:latin typeface="Amiri" pitchFamily="2" charset="-78"/>
+                <a:ea typeface="Amiri" pitchFamily="2" charset="-78"/>
                 <a:cs typeface="Amiri" pitchFamily="2" charset="-78"/>
               </a:rPr>
               <a:t>دَوْرُكَ!</a:t>
@@ -41618,6 +41880,7 @@
                   <a:srgbClr val="1B3B6F"/>
                 </a:solidFill>
                 <a:latin typeface="Amiri" pitchFamily="2" charset="-78"/>
+                <a:ea typeface="Amiri" pitchFamily="2" charset="-78"/>
                 <a:cs typeface="Amiri" pitchFamily="2" charset="-78"/>
               </a:rPr>
               <a:t>أَحْسَنْتَ! / أَحْسَنْتِ!</a:t>
@@ -41694,6 +41957,7 @@
                   <a:srgbClr val="1B3B6F"/>
                 </a:solidFill>
                 <a:latin typeface="Amiri" pitchFamily="2" charset="-78"/>
+                <a:ea typeface="Amiri" pitchFamily="2" charset="-78"/>
                 <a:cs typeface="Amiri" pitchFamily="2" charset="-78"/>
               </a:rPr>
               <a:t>تَكَلَّمْ أَكْثَرَ، مِنْ فَضْلِكَ</a:t>
@@ -41770,6 +42034,7 @@
                   <a:srgbClr val="1B3B6F"/>
                 </a:solidFill>
                 <a:latin typeface="Amiri" pitchFamily="2" charset="-78"/>
+                <a:ea typeface="Amiri" pitchFamily="2" charset="-78"/>
                 <a:cs typeface="Amiri" pitchFamily="2" charset="-78"/>
               </a:rPr>
               <a:t>لِمَاذَا؟</a:t>
@@ -41941,6 +42206,7 @@
                   <a:srgbClr val="D4AF37"/>
                 </a:solidFill>
                 <a:latin typeface="Amiri" pitchFamily="2" charset="-78"/>
+                <a:ea typeface="Amiri" pitchFamily="2" charset="-78"/>
                 <a:cs typeface="Amiri" pitchFamily="2" charset="-78"/>
               </a:rPr>
               <a:t>م</a:t>
@@ -42261,6 +42527,7 @@
                   <a:srgbClr val="8A6D1E"/>
                 </a:solidFill>
                 <a:latin typeface="Amiri" pitchFamily="2" charset="-78"/>
+                <a:ea typeface="Amiri" pitchFamily="2" charset="-78"/>
                 <a:cs typeface="Amiri" pitchFamily="2" charset="-78"/>
               </a:rPr>
               <a:t>كَيْفَ تَذْهَبُ إِلَى المَدْرَسَةِ؟</a:t>
@@ -42541,6 +42808,7 @@
                   <a:srgbClr val="1B3B6F"/>
                 </a:solidFill>
                 <a:latin typeface="Amiri" pitchFamily="2" charset="-78"/>
+                <a:ea typeface="Amiri" pitchFamily="2" charset="-78"/>
                 <a:cs typeface="Amiri" pitchFamily="2" charset="-78"/>
               </a:rPr>
               <a:t>أَذْهَبُ بِالحَافِلَةِ / بِالسَّيَّارَةِ …</a:t>
@@ -42617,6 +42885,7 @@
                   <a:srgbClr val="1B3B6F"/>
                 </a:solidFill>
                 <a:latin typeface="Amiri" pitchFamily="2" charset="-78"/>
+                <a:ea typeface="Amiri" pitchFamily="2" charset="-78"/>
                 <a:cs typeface="Amiri" pitchFamily="2" charset="-78"/>
               </a:rPr>
               <a:t>كَيْفَ تَذْهَبُ إِلَى المَدْرَسَةِ؟</a:t>
@@ -42785,6 +43054,7 @@
                   <a:srgbClr val="1B3B6F"/>
                 </a:solidFill>
                 <a:latin typeface="Amiri" pitchFamily="2" charset="-78"/>
+                <a:ea typeface="Amiri" pitchFamily="2" charset="-78"/>
                 <a:cs typeface="Amiri" pitchFamily="2" charset="-78"/>
               </a:rPr>
               <a:t>أَخْرُجُ فِي السَّاعَةِ …</a:t>
@@ -42861,6 +43131,7 @@
                   <a:srgbClr val="1B3B6F"/>
                 </a:solidFill>
                 <a:latin typeface="Amiri" pitchFamily="2" charset="-78"/>
+                <a:ea typeface="Amiri" pitchFamily="2" charset="-78"/>
                 <a:cs typeface="Amiri" pitchFamily="2" charset="-78"/>
               </a:rPr>
               <a:t>مَتَى تَخْرُجُ مِنَ البَيْتِ؟</a:t>
@@ -43029,6 +43300,7 @@
                   <a:srgbClr val="1B3B6F"/>
                 </a:solidFill>
                 <a:latin typeface="Amiri" pitchFamily="2" charset="-78"/>
+                <a:ea typeface="Amiri" pitchFamily="2" charset="-78"/>
                 <a:cs typeface="Amiri" pitchFamily="2" charset="-78"/>
               </a:rPr>
               <a:t>تَسْتَغْرِقُ … دَقِيقَةً</a:t>
@@ -43105,6 +43377,7 @@
                   <a:srgbClr val="1B3B6F"/>
                 </a:solidFill>
                 <a:latin typeface="Amiri" pitchFamily="2" charset="-78"/>
+                <a:ea typeface="Amiri" pitchFamily="2" charset="-78"/>
                 <a:cs typeface="Amiri" pitchFamily="2" charset="-78"/>
               </a:rPr>
               <a:t>كَمْ دَقِيقَةً تَسْتَغْرِقُ الرِّحْلَةُ؟</a:t>
@@ -43273,6 +43546,7 @@
                   <a:srgbClr val="1B3B6F"/>
                 </a:solidFill>
                 <a:latin typeface="Amiri" pitchFamily="2" charset="-78"/>
+                <a:ea typeface="Amiri" pitchFamily="2" charset="-78"/>
                 <a:cs typeface="Amiri" pitchFamily="2" charset="-78"/>
               </a:rPr>
               <a:t>أَذْهَبُ مَعَ …</a:t>
@@ -43349,6 +43623,7 @@
                   <a:srgbClr val="1B3B6F"/>
                 </a:solidFill>
                 <a:latin typeface="Amiri" pitchFamily="2" charset="-78"/>
+                <a:ea typeface="Amiri" pitchFamily="2" charset="-78"/>
                 <a:cs typeface="Amiri" pitchFamily="2" charset="-78"/>
               </a:rPr>
               <a:t>مَعَ مَنْ تَذْهَبُ؟</a:t>
@@ -43517,6 +43792,7 @@
                   <a:srgbClr val="1B3B6F"/>
                 </a:solidFill>
                 <a:latin typeface="Amiri" pitchFamily="2" charset="-78"/>
+                <a:ea typeface="Amiri" pitchFamily="2" charset="-78"/>
                 <a:cs typeface="Amiri" pitchFamily="2" charset="-78"/>
               </a:rPr>
               <a:t>نَعَمْ / لَا، لِأَنَّهَا …</a:t>
@@ -43593,6 +43869,7 @@
                   <a:srgbClr val="1B3B6F"/>
                 </a:solidFill>
                 <a:latin typeface="Amiri" pitchFamily="2" charset="-78"/>
+                <a:ea typeface="Amiri" pitchFamily="2" charset="-78"/>
                 <a:cs typeface="Amiri" pitchFamily="2" charset="-78"/>
               </a:rPr>
               <a:t>هَلْ تُحِبُّ الحَافِلَةَ؟</a:t>
@@ -43867,6 +44144,7 @@
                   <a:srgbClr val="D4AF37"/>
                 </a:solidFill>
                 <a:latin typeface="Amiri" pitchFamily="2" charset="-78"/>
+                <a:ea typeface="Amiri" pitchFamily="2" charset="-78"/>
                 <a:cs typeface="Amiri" pitchFamily="2" charset="-78"/>
               </a:rPr>
               <a:t>م</a:t>
@@ -44187,6 +44465,7 @@
                   <a:srgbClr val="8A6D1E"/>
                 </a:solidFill>
                 <a:latin typeface="Amiri" pitchFamily="2" charset="-78"/>
+                <a:ea typeface="Amiri" pitchFamily="2" charset="-78"/>
                 <a:cs typeface="Amiri" pitchFamily="2" charset="-78"/>
               </a:rPr>
               <a:t>فِي مَحَطَّةِ القِطَارِ</a:t>
@@ -44467,6 +44746,7 @@
                   <a:srgbClr val="1B3B6F"/>
                 </a:solidFill>
                 <a:latin typeface="Amiri" pitchFamily="2" charset="-78"/>
+                <a:ea typeface="Amiri" pitchFamily="2" charset="-78"/>
                 <a:cs typeface="Amiri" pitchFamily="2" charset="-78"/>
               </a:rPr>
               <a:t>أُرِيدُ تَذْكِرَةً إِلَى …</a:t>
@@ -44543,6 +44823,7 @@
                   <a:srgbClr val="1B3B6F"/>
                 </a:solidFill>
                 <a:latin typeface="Amiri" pitchFamily="2" charset="-78"/>
+                <a:ea typeface="Amiri" pitchFamily="2" charset="-78"/>
                 <a:cs typeface="Amiri" pitchFamily="2" charset="-78"/>
               </a:rPr>
               <a:t>أَهْلًا، إِلَى أَيْنَ؟</a:t>
@@ -44711,6 +44992,7 @@
                   <a:srgbClr val="1B3B6F"/>
                 </a:solidFill>
                 <a:latin typeface="Amiri" pitchFamily="2" charset="-78"/>
+                <a:ea typeface="Amiri" pitchFamily="2" charset="-78"/>
                 <a:cs typeface="Amiri" pitchFamily="2" charset="-78"/>
               </a:rPr>
               <a:t>ذَهَابٌ وَعَوْدَةٌ، …</a:t>
@@ -44787,6 +45069,7 @@
                   <a:srgbClr val="1B3B6F"/>
                 </a:solidFill>
                 <a:latin typeface="Amiri" pitchFamily="2" charset="-78"/>
+                <a:ea typeface="Amiri" pitchFamily="2" charset="-78"/>
                 <a:cs typeface="Amiri" pitchFamily="2" charset="-78"/>
               </a:rPr>
               <a:t>ذَهَابٌ فَقَطْ أَمْ ذَهَابٌ وَعَوْدَةٌ؟</a:t>
@@ -44955,6 +45238,7 @@
                   <a:srgbClr val="1B3B6F"/>
                 </a:solidFill>
                 <a:latin typeface="Amiri" pitchFamily="2" charset="-78"/>
+                <a:ea typeface="Amiri" pitchFamily="2" charset="-78"/>
                 <a:cs typeface="Amiri" pitchFamily="2" charset="-78"/>
               </a:rPr>
               <a:t>أَيُّ قِطَارٍ أَسْرَعُ؟</a:t>
@@ -45031,6 +45315,7 @@
                   <a:srgbClr val="1B3B6F"/>
                 </a:solidFill>
                 <a:latin typeface="Amiri" pitchFamily="2" charset="-78"/>
+                <a:ea typeface="Amiri" pitchFamily="2" charset="-78"/>
                 <a:cs typeface="Amiri" pitchFamily="2" charset="-78"/>
               </a:rPr>
               <a:t>هُنَاكَ قِطَارٌ فِي التَّاسِعَةِ وَقِطَارٌ فِي الحَادِيَةَ عَشْرَةَ.</a:t>
@@ -45134,6 +45419,7 @@
                   <a:srgbClr val="1B3B6F"/>
                 </a:solidFill>
                 <a:latin typeface="Amiri" pitchFamily="2" charset="-78"/>
+                <a:ea typeface="Amiri" pitchFamily="2" charset="-78"/>
                 <a:cs typeface="Amiri" pitchFamily="2" charset="-78"/>
               </a:rPr>
               <a:t>سَآخُذُ … بِكَمِ التَّذْكِرَةُ؟</a:t>
@@ -45210,6 +45496,7 @@
                   <a:srgbClr val="1B3B6F"/>
                 </a:solidFill>
                 <a:latin typeface="Amiri" pitchFamily="2" charset="-78"/>
+                <a:ea typeface="Amiri" pitchFamily="2" charset="-78"/>
                 <a:cs typeface="Amiri" pitchFamily="2" charset="-78"/>
               </a:rPr>
               <a:t>قِطَارُ التَّاسِعَةِ يَصِلُ بَعْدَ سَاعَتَيْنِ.</a:t>
@@ -45313,6 +45600,7 @@
                   <a:srgbClr val="1B3B6F"/>
                 </a:solidFill>
                 <a:latin typeface="Amiri" pitchFamily="2" charset="-78"/>
+                <a:ea typeface="Amiri" pitchFamily="2" charset="-78"/>
                 <a:cs typeface="Amiri" pitchFamily="2" charset="-78"/>
               </a:rPr>
               <a:t>بِالبِطَاقَةِ / نَقْدًا …</a:t>
@@ -45389,6 +45677,7 @@
                   <a:srgbClr val="1B3B6F"/>
                 </a:solidFill>
                 <a:latin typeface="Amiri" pitchFamily="2" charset="-78"/>
+                <a:ea typeface="Amiri" pitchFamily="2" charset="-78"/>
                 <a:cs typeface="Amiri" pitchFamily="2" charset="-78"/>
               </a:rPr>
               <a:t>كَيْفَ تُرِيدُ أَنْ تَدْفَعَ؟</a:t>
@@ -45563,13 +45852,9 @@
     <a:fontScheme name="Office">
       <a:majorFont>
         <a:latin typeface="Calibri Light" panose="020F0302020204030204"/>
-        <a:ea typeface=""/>
-        <a:cs typeface=""/>
-        <a:font script="Jpan" typeface="游ゴシック Light"/>
-        <a:font script="Hang" typeface="맑은 고딕"/>
-        <a:font script="Hans" typeface="等线 Light"/>
-        <a:font script="Hant" typeface="新細明體"/>
-        <a:font script="Arab" typeface="Times New Roman"/>
+        <a:ea typeface="Amiri" pitchFamily="2" charset="-78"/>
+        <a:cs typeface="Amiri" pitchFamily="2" charset="-78"/>
+        <a:font script="Arab" typeface="Amiri"/>
         <a:font script="Hebr" typeface="Times New Roman"/>
         <a:font script="Thai" typeface="Angsana New"/>
         <a:font script="Ethi" typeface="Nyala"/>
@@ -45615,13 +45900,9 @@
       </a:majorFont>
       <a:minorFont>
         <a:latin typeface="Calibri" panose="020F0502020204030204"/>
-        <a:ea typeface=""/>
-        <a:cs typeface=""/>
-        <a:font script="Jpan" typeface="游ゴシック"/>
-        <a:font script="Hang" typeface="맑은 고딕"/>
-        <a:font script="Hans" typeface="等线"/>
-        <a:font script="Hant" typeface="新細明體"/>
-        <a:font script="Arab" typeface="Arial"/>
+        <a:ea typeface="Amiri" pitchFamily="2" charset="-78"/>
+        <a:cs typeface="Amiri" pitchFamily="2" charset="-78"/>
+        <a:font script="Arab" typeface="Amiri"/>
         <a:font script="Hebr" typeface="Arial"/>
         <a:font script="Thai" typeface="Cordia New"/>
         <a:font script="Ethi" typeface="Nyala"/>
